--- a/outputs/tutoring/tsukasa/school-slides/deck.pptx
+++ b/outputs/tutoring/tsukasa/school-slides/deck.pptx
@@ -3503,7 +3503,7 @@
       <p:grpSpPr/>
       <p:pic>
         <p:nvPicPr>
-          <p:cNvPr id="2" name="Picture 1" descr="wiki_campus_hero.jpg"/>
+          <p:cNvPr id="2" name="Picture 1" descr="wiki_beach_hero.jpg"/>
           <p:cNvPicPr>
             <a:picLocks noChangeAspect="1"/>
           </p:cNvPicPr>
@@ -3511,7 +3511,7 @@
         </p:nvPicPr>
         <p:blipFill>
           <a:blip r:embed="rId2"/>
-          <a:srcRect t="7825" b="7825"/>
+          <a:srcRect t="7982" b="7982"/>
           <a:stretch>
             <a:fillRect/>
           </a:stretch>
@@ -3775,7 +3775,7 @@
                 <a:ea typeface="Hiragino Sans"/>
                 <a:cs typeface="Hiragino Sans"/>
               </a:rPr>
-              <a:t>海と江の島が見える、坂の上の学校</a:t>
+              <a:t>教室の窓の外が、海。</a:t>
             </a:r>
           </a:p>
         </p:txBody>
@@ -3968,24 +3968,26 @@
       </p:sp>
       <p:sp>
         <p:nvSpPr>
-          <p:cNvPr id="6" name="Oval 5"/>
+          <p:cNvPr id="6" name="Rounded Rectangle 5"/>
           <p:cNvSpPr/>
           <p:nvPr/>
         </p:nvSpPr>
         <p:spPr>
           <a:xfrm>
-            <a:off x="658368" y="1691640"/>
-            <a:ext cx="182880" cy="182880"/>
-          </a:xfrm>
-          <a:prstGeom prst="ellipse">
-            <a:avLst/>
-          </a:prstGeom>
-          <a:solidFill>
-            <a:srgbClr val="2E8FA3"/>
+            <a:off x="658368" y="1170432"/>
+            <a:ext cx="3456432" cy="1444752"/>
+          </a:xfrm>
+          <a:prstGeom prst="roundRect">
+            <a:avLst>
+              <a:gd name="adj" fmla="val 6000"/>
+            </a:avLst>
+          </a:prstGeom>
+          <a:solidFill>
+            <a:srgbClr val="FFFFFF"/>
           </a:solidFill>
           <a:ln w="9525">
             <a:solidFill>
-              <a:srgbClr val="2E8FA3"/>
+              <a:srgbClr val="D7DDE8"/>
             </a:solidFill>
           </a:ln>
         </p:spPr>
@@ -4011,357 +4013,9 @@
           </a:p>
         </p:txBody>
       </p:sp>
-      <p:sp>
-        <p:nvSpPr>
-          <p:cNvPr id="7" name="TextBox 6"/>
-          <p:cNvSpPr txBox="1"/>
-          <p:nvPr/>
-        </p:nvSpPr>
-        <p:spPr>
-          <a:xfrm>
-            <a:off x="1170432" y="1572768"/>
-            <a:ext cx="5806440" cy="530352"/>
-          </a:xfrm>
-          <a:prstGeom prst="rect">
-            <a:avLst/>
-          </a:prstGeom>
-          <a:noFill/>
-        </p:spPr>
-        <p:txBody>
-          <a:bodyPr wrap="square" anchor="t" lIns="0" rIns="0" tIns="0" bIns="0">
-            <a:spAutoFit/>
-          </a:bodyPr>
-          <a:lstStyle/>
-          <a:p>
-            <a:pPr algn="l">
-              <a:lnSpc>
-                <a:spcPct val="118000"/>
-              </a:lnSpc>
-            </a:pPr>
-            <a:r>
-              <a:rPr sz="1800" b="1">
-                <a:solidFill>
-                  <a:srgbClr val="1A1A1A"/>
-                </a:solidFill>
-                <a:latin typeface="Hiragino Sans"/>
-                <a:ea typeface="Hiragino Sans"/>
-                <a:cs typeface="Hiragino Sans"/>
-              </a:rPr>
-              <a:t>教室から相模湾と江の島が一望できる、海沿いの立地</a:t>
-            </a:r>
-          </a:p>
-        </p:txBody>
-      </p:sp>
-      <p:sp>
-        <p:nvSpPr>
-          <p:cNvPr id="8" name="Oval 7"/>
-          <p:cNvSpPr/>
-          <p:nvPr/>
-        </p:nvSpPr>
-        <p:spPr>
-          <a:xfrm>
-            <a:off x="658368" y="2606040"/>
-            <a:ext cx="182880" cy="182880"/>
-          </a:xfrm>
-          <a:prstGeom prst="ellipse">
-            <a:avLst/>
-          </a:prstGeom>
-          <a:solidFill>
-            <a:srgbClr val="2E8FA3"/>
-          </a:solidFill>
-          <a:ln w="9525">
-            <a:solidFill>
-              <a:srgbClr val="2E8FA3"/>
-            </a:solidFill>
-          </a:ln>
-        </p:spPr>
-        <p:style>
-          <a:lnRef idx="1">
-            <a:schemeClr val="accent1"/>
-          </a:lnRef>
-          <a:fillRef idx="3">
-            <a:schemeClr val="accent1"/>
-          </a:fillRef>
-          <a:effectRef idx="2">
-            <a:schemeClr val="accent1"/>
-          </a:effectRef>
-          <a:fontRef idx="minor">
-            <a:schemeClr val="lt1"/>
-          </a:fontRef>
-        </p:style>
-        <p:txBody>
-          <a:bodyPr rtlCol="0" anchor="ctr"/>
-          <a:lstStyle/>
-          <a:p>
-            <a:pPr algn="ctr"/>
-          </a:p>
-        </p:txBody>
-      </p:sp>
-      <p:sp>
-        <p:nvSpPr>
-          <p:cNvPr id="9" name="TextBox 8"/>
-          <p:cNvSpPr txBox="1"/>
-          <p:nvPr/>
-        </p:nvSpPr>
-        <p:spPr>
-          <a:xfrm>
-            <a:off x="1170432" y="2487168"/>
-            <a:ext cx="5806440" cy="530352"/>
-          </a:xfrm>
-          <a:prstGeom prst="rect">
-            <a:avLst/>
-          </a:prstGeom>
-          <a:noFill/>
-        </p:spPr>
-        <p:txBody>
-          <a:bodyPr wrap="square" anchor="t" lIns="0" rIns="0" tIns="0" bIns="0">
-            <a:spAutoFit/>
-          </a:bodyPr>
-          <a:lstStyle/>
-          <a:p>
-            <a:pPr algn="l">
-              <a:lnSpc>
-                <a:spcPct val="118000"/>
-              </a:lnSpc>
-            </a:pPr>
-            <a:r>
-              <a:rPr sz="1800" b="1">
-                <a:solidFill>
-                  <a:srgbClr val="1A1A1A"/>
-                </a:solidFill>
-                <a:latin typeface="Hiragino Sans"/>
-                <a:ea typeface="Hiragino Sans"/>
-                <a:cs typeface="Hiragino Sans"/>
-              </a:rPr>
-              <a:t>校訓は「自学自習・自主自律」。自分で考えて動く自由な空気</a:t>
-            </a:r>
-          </a:p>
-        </p:txBody>
-      </p:sp>
-      <p:sp>
-        <p:nvSpPr>
-          <p:cNvPr id="10" name="Oval 9"/>
-          <p:cNvSpPr/>
-          <p:nvPr/>
-        </p:nvSpPr>
-        <p:spPr>
-          <a:xfrm>
-            <a:off x="658368" y="3520440"/>
-            <a:ext cx="182880" cy="182880"/>
-          </a:xfrm>
-          <a:prstGeom prst="ellipse">
-            <a:avLst/>
-          </a:prstGeom>
-          <a:solidFill>
-            <a:srgbClr val="2E8FA3"/>
-          </a:solidFill>
-          <a:ln w="9525">
-            <a:solidFill>
-              <a:srgbClr val="2E8FA3"/>
-            </a:solidFill>
-          </a:ln>
-        </p:spPr>
-        <p:style>
-          <a:lnRef idx="1">
-            <a:schemeClr val="accent1"/>
-          </a:lnRef>
-          <a:fillRef idx="3">
-            <a:schemeClr val="accent1"/>
-          </a:fillRef>
-          <a:effectRef idx="2">
-            <a:schemeClr val="accent1"/>
-          </a:effectRef>
-          <a:fontRef idx="minor">
-            <a:schemeClr val="lt1"/>
-          </a:fontRef>
-        </p:style>
-        <p:txBody>
-          <a:bodyPr rtlCol="0" anchor="ctr"/>
-          <a:lstStyle/>
-          <a:p>
-            <a:pPr algn="ctr"/>
-          </a:p>
-        </p:txBody>
-      </p:sp>
-      <p:sp>
-        <p:nvSpPr>
-          <p:cNvPr id="11" name="TextBox 10"/>
-          <p:cNvSpPr txBox="1"/>
-          <p:nvPr/>
-        </p:nvSpPr>
-        <p:spPr>
-          <a:xfrm>
-            <a:off x="1170432" y="3401568"/>
-            <a:ext cx="5806440" cy="530352"/>
-          </a:xfrm>
-          <a:prstGeom prst="rect">
-            <a:avLst/>
-          </a:prstGeom>
-          <a:noFill/>
-        </p:spPr>
-        <p:txBody>
-          <a:bodyPr wrap="square" anchor="t" lIns="0" rIns="0" tIns="0" bIns="0">
-            <a:spAutoFit/>
-          </a:bodyPr>
-          <a:lstStyle/>
-          <a:p>
-            <a:pPr algn="l">
-              <a:lnSpc>
-                <a:spcPct val="118000"/>
-              </a:lnSpc>
-            </a:pPr>
-            <a:r>
-              <a:rPr sz="1800" b="1">
-                <a:solidFill>
-                  <a:srgbClr val="1A1A1A"/>
-                </a:solidFill>
-                <a:latin typeface="Hiragino Sans"/>
-                <a:ea typeface="Hiragino Sans"/>
-                <a:cs typeface="Hiragino Sans"/>
-              </a:rPr>
-              <a:t>文化祭「七高祭」・体育祭「七里ンピック」は生徒が主役。野外ステージで盛り上がる行事も</a:t>
-            </a:r>
-          </a:p>
-        </p:txBody>
-      </p:sp>
-      <p:sp>
-        <p:nvSpPr>
-          <p:cNvPr id="12" name="Rounded Rectangle 11"/>
-          <p:cNvSpPr/>
-          <p:nvPr/>
-        </p:nvSpPr>
-        <p:spPr>
-          <a:xfrm>
-            <a:off x="658368" y="4709160"/>
-            <a:ext cx="6217920" cy="566928"/>
-          </a:xfrm>
-          <a:prstGeom prst="roundRect">
-            <a:avLst>
-              <a:gd name="adj" fmla="val 6000"/>
-            </a:avLst>
-          </a:prstGeom>
-          <a:solidFill>
-            <a:srgbClr val="FFFFFF"/>
-          </a:solidFill>
-          <a:ln w="9525">
-            <a:solidFill>
-              <a:srgbClr val="D7DDE8"/>
-            </a:solidFill>
-          </a:ln>
-        </p:spPr>
-        <p:style>
-          <a:lnRef idx="1">
-            <a:schemeClr val="accent1"/>
-          </a:lnRef>
-          <a:fillRef idx="3">
-            <a:schemeClr val="accent1"/>
-          </a:fillRef>
-          <a:effectRef idx="2">
-            <a:schemeClr val="accent1"/>
-          </a:effectRef>
-          <a:fontRef idx="minor">
-            <a:schemeClr val="lt1"/>
-          </a:fontRef>
-        </p:style>
-        <p:txBody>
-          <a:bodyPr rtlCol="0" anchor="ctr"/>
-          <a:lstStyle/>
-          <a:p>
-            <a:pPr algn="ctr"/>
-          </a:p>
-        </p:txBody>
-      </p:sp>
-      <p:sp>
-        <p:nvSpPr>
-          <p:cNvPr id="13" name="TextBox 12"/>
-          <p:cNvSpPr txBox="1"/>
-          <p:nvPr/>
-        </p:nvSpPr>
-        <p:spPr>
-          <a:xfrm>
-            <a:off x="932688" y="4882896"/>
-            <a:ext cx="5669280" cy="219456"/>
-          </a:xfrm>
-          <a:prstGeom prst="rect">
-            <a:avLst/>
-          </a:prstGeom>
-          <a:noFill/>
-        </p:spPr>
-        <p:txBody>
-          <a:bodyPr wrap="square" anchor="ctr" lIns="0" rIns="0" tIns="0" bIns="0">
-            <a:spAutoFit/>
-          </a:bodyPr>
-          <a:lstStyle/>
-          <a:p>
-            <a:pPr algn="l">
-              <a:lnSpc>
-                <a:spcPct val="115000"/>
-              </a:lnSpc>
-            </a:pPr>
-            <a:r>
-              <a:rPr sz="1500" b="1">
-                <a:solidFill>
-                  <a:srgbClr val="1E6575"/>
-                </a:solidFill>
-                <a:latin typeface="Hiragino Sans"/>
-                <a:ea typeface="Hiragino Sans"/>
-                <a:cs typeface="Hiragino Sans"/>
-              </a:rPr>
-              <a:t>江ノ電「七里ヶ浜」駅から徒歩すぐ</a:t>
-            </a:r>
-          </a:p>
-        </p:txBody>
-      </p:sp>
-      <p:sp>
-        <p:nvSpPr>
-          <p:cNvPr id="14" name="Rounded Rectangle 13"/>
-          <p:cNvSpPr/>
-          <p:nvPr/>
-        </p:nvSpPr>
-        <p:spPr>
-          <a:xfrm>
-            <a:off x="7360920" y="1389888"/>
-            <a:ext cx="4224528" cy="2487168"/>
-          </a:xfrm>
-          <a:prstGeom prst="roundRect">
-            <a:avLst>
-              <a:gd name="adj" fmla="val 6000"/>
-            </a:avLst>
-          </a:prstGeom>
-          <a:solidFill>
-            <a:srgbClr val="FFFFFF"/>
-          </a:solidFill>
-          <a:ln w="9525">
-            <a:solidFill>
-              <a:srgbClr val="D7DDE8"/>
-            </a:solidFill>
-          </a:ln>
-        </p:spPr>
-        <p:style>
-          <a:lnRef idx="1">
-            <a:schemeClr val="accent1"/>
-          </a:lnRef>
-          <a:fillRef idx="3">
-            <a:schemeClr val="accent1"/>
-          </a:fillRef>
-          <a:effectRef idx="2">
-            <a:schemeClr val="accent1"/>
-          </a:effectRef>
-          <a:fontRef idx="minor">
-            <a:schemeClr val="lt1"/>
-          </a:fontRef>
-        </p:style>
-        <p:txBody>
-          <a:bodyPr rtlCol="0" anchor="ctr"/>
-          <a:lstStyle/>
-          <a:p>
-            <a:pPr algn="ctr"/>
-          </a:p>
-        </p:txBody>
-      </p:sp>
       <p:pic>
         <p:nvPicPr>
-          <p:cNvPr id="15" name="Picture 14" descr="shichirinpic_card.jpg"/>
+          <p:cNvPr id="7" name="Picture 6" descr="wiki_campus_hero.jpg"/>
           <p:cNvPicPr>
             <a:picLocks noChangeAspect="1"/>
           </p:cNvPicPr>
@@ -4369,15 +4023,15 @@
         </p:nvPicPr>
         <p:blipFill>
           <a:blip r:embed="rId2"/>
-          <a:srcRect l="8580" r="8580"/>
+          <a:srcRect t="20589" b="20589"/>
           <a:stretch>
             <a:fillRect/>
           </a:stretch>
         </p:blipFill>
         <p:spPr>
           <a:xfrm>
-            <a:off x="7434072" y="1463040"/>
-            <a:ext cx="4078224" cy="2340864"/>
+            <a:off x="731520" y="1243584"/>
+            <a:ext cx="3310128" cy="1298448"/>
           </a:xfrm>
           <a:prstGeom prst="rect">
             <a:avLst/>
@@ -4386,14 +4040,14 @@
       </p:pic>
       <p:sp>
         <p:nvSpPr>
-          <p:cNvPr id="16" name="Rounded Rectangle 15"/>
+          <p:cNvPr id="8" name="Rounded Rectangle 7"/>
           <p:cNvSpPr/>
           <p:nvPr/>
         </p:nvSpPr>
         <p:spPr>
           <a:xfrm>
-            <a:off x="7434072" y="1463040"/>
-            <a:ext cx="4078224" cy="2340864"/>
+            <a:off x="731520" y="1243584"/>
+            <a:ext cx="3310128" cy="1298448"/>
           </a:xfrm>
           <a:prstGeom prst="roundRect">
             <a:avLst>
@@ -4431,14 +4085,14 @@
       </p:sp>
       <p:sp>
         <p:nvSpPr>
-          <p:cNvPr id="17" name="Rounded Rectangle 16"/>
+          <p:cNvPr id="9" name="Rounded Rectangle 8"/>
           <p:cNvSpPr/>
           <p:nvPr/>
         </p:nvSpPr>
         <p:spPr>
           <a:xfrm>
-            <a:off x="7434072" y="3474720"/>
-            <a:ext cx="4078224" cy="329184"/>
+            <a:off x="731520" y="2212848"/>
+            <a:ext cx="3310128" cy="329184"/>
           </a:xfrm>
           <a:prstGeom prst="roundRect">
             <a:avLst>
@@ -4476,14 +4130,420 @@
       </p:sp>
       <p:sp>
         <p:nvSpPr>
-          <p:cNvPr id="18" name="TextBox 17"/>
+          <p:cNvPr id="10" name="TextBox 9"/>
           <p:cNvSpPr txBox="1"/>
           <p:nvPr/>
         </p:nvSpPr>
         <p:spPr>
           <a:xfrm>
-            <a:off x="7562088" y="3529584"/>
-            <a:ext cx="3822192" cy="219456"/>
+            <a:off x="859536" y="2267712"/>
+            <a:ext cx="3054096" cy="219456"/>
+          </a:xfrm>
+          <a:prstGeom prst="rect">
+            <a:avLst/>
+          </a:prstGeom>
+          <a:noFill/>
+        </p:spPr>
+        <p:txBody>
+          <a:bodyPr wrap="square" anchor="ctr" lIns="0" rIns="0" tIns="0" bIns="0">
+            <a:spAutoFit/>
+          </a:bodyPr>
+          <a:lstStyle/>
+          <a:p>
+            <a:pPr algn="l">
+              <a:lnSpc>
+                <a:spcPct val="115000"/>
+              </a:lnSpc>
+            </a:pPr>
+            <a:r>
+              <a:rPr sz="900" b="1">
+                <a:solidFill>
+                  <a:srgbClr val="FFFFFF"/>
+                </a:solidFill>
+                <a:latin typeface="Hiragino Sans"/>
+                <a:ea typeface="Hiragino Sans"/>
+                <a:cs typeface="Hiragino Sans"/>
+              </a:rPr>
+              <a:t>校舎</a:t>
+            </a:r>
+          </a:p>
+        </p:txBody>
+      </p:sp>
+      <p:sp>
+        <p:nvSpPr>
+          <p:cNvPr id="11" name="Rounded Rectangle 10"/>
+          <p:cNvSpPr/>
+          <p:nvPr/>
+        </p:nvSpPr>
+        <p:spPr>
+          <a:xfrm>
+            <a:off x="4334256" y="1170432"/>
+            <a:ext cx="3456432" cy="1444752"/>
+          </a:xfrm>
+          <a:prstGeom prst="roundRect">
+            <a:avLst>
+              <a:gd name="adj" fmla="val 6000"/>
+            </a:avLst>
+          </a:prstGeom>
+          <a:solidFill>
+            <a:srgbClr val="FFFFFF"/>
+          </a:solidFill>
+          <a:ln w="9525">
+            <a:solidFill>
+              <a:srgbClr val="D7DDE8"/>
+            </a:solidFill>
+          </a:ln>
+        </p:spPr>
+        <p:style>
+          <a:lnRef idx="1">
+            <a:schemeClr val="accent1"/>
+          </a:lnRef>
+          <a:fillRef idx="3">
+            <a:schemeClr val="accent1"/>
+          </a:fillRef>
+          <a:effectRef idx="2">
+            <a:schemeClr val="accent1"/>
+          </a:effectRef>
+          <a:fontRef idx="minor">
+            <a:schemeClr val="lt1"/>
+          </a:fontRef>
+        </p:style>
+        <p:txBody>
+          <a:bodyPr rtlCol="0" anchor="ctr"/>
+          <a:lstStyle/>
+          <a:p>
+            <a:pPr algn="ctr"/>
+          </a:p>
+        </p:txBody>
+      </p:sp>
+      <p:pic>
+        <p:nvPicPr>
+          <p:cNvPr id="12" name="Picture 11" descr="wiki_enoden_card.jpg"/>
+          <p:cNvPicPr>
+            <a:picLocks noChangeAspect="1"/>
+          </p:cNvPicPr>
+          <p:nvPr/>
+        </p:nvPicPr>
+        <p:blipFill>
+          <a:blip r:embed="rId3"/>
+          <a:srcRect l="34" r="34"/>
+          <a:stretch>
+            <a:fillRect/>
+          </a:stretch>
+        </p:blipFill>
+        <p:spPr>
+          <a:xfrm>
+            <a:off x="4407408" y="1243584"/>
+            <a:ext cx="3310128" cy="1298448"/>
+          </a:xfrm>
+          <a:prstGeom prst="rect">
+            <a:avLst/>
+          </a:prstGeom>
+        </p:spPr>
+      </p:pic>
+      <p:sp>
+        <p:nvSpPr>
+          <p:cNvPr id="13" name="Rounded Rectangle 12"/>
+          <p:cNvSpPr/>
+          <p:nvPr/>
+        </p:nvSpPr>
+        <p:spPr>
+          <a:xfrm>
+            <a:off x="4407408" y="1243584"/>
+            <a:ext cx="3310128" cy="1298448"/>
+          </a:xfrm>
+          <a:prstGeom prst="roundRect">
+            <a:avLst>
+              <a:gd name="adj" fmla="val 4000"/>
+            </a:avLst>
+          </a:prstGeom>
+          <a:noFill/>
+          <a:ln w="12700">
+            <a:solidFill>
+              <a:srgbClr val="FFFFFF"/>
+            </a:solidFill>
+          </a:ln>
+        </p:spPr>
+        <p:style>
+          <a:lnRef idx="1">
+            <a:schemeClr val="accent1"/>
+          </a:lnRef>
+          <a:fillRef idx="3">
+            <a:schemeClr val="accent1"/>
+          </a:fillRef>
+          <a:effectRef idx="2">
+            <a:schemeClr val="accent1"/>
+          </a:effectRef>
+          <a:fontRef idx="minor">
+            <a:schemeClr val="lt1"/>
+          </a:fontRef>
+        </p:style>
+        <p:txBody>
+          <a:bodyPr rtlCol="0" anchor="ctr"/>
+          <a:lstStyle/>
+          <a:p>
+            <a:pPr algn="ctr"/>
+          </a:p>
+        </p:txBody>
+      </p:sp>
+      <p:sp>
+        <p:nvSpPr>
+          <p:cNvPr id="14" name="Rounded Rectangle 13"/>
+          <p:cNvSpPr/>
+          <p:nvPr/>
+        </p:nvSpPr>
+        <p:spPr>
+          <a:xfrm>
+            <a:off x="4407408" y="2212848"/>
+            <a:ext cx="3310128" cy="329184"/>
+          </a:xfrm>
+          <a:prstGeom prst="roundRect">
+            <a:avLst>
+              <a:gd name="adj" fmla="val 6000"/>
+            </a:avLst>
+          </a:prstGeom>
+          <a:solidFill>
+            <a:srgbClr val="0A162A"/>
+          </a:solidFill>
+          <a:ln>
+            <a:noFill/>
+          </a:ln>
+        </p:spPr>
+        <p:style>
+          <a:lnRef idx="1">
+            <a:schemeClr val="accent1"/>
+          </a:lnRef>
+          <a:fillRef idx="3">
+            <a:schemeClr val="accent1"/>
+          </a:fillRef>
+          <a:effectRef idx="2">
+            <a:schemeClr val="accent1"/>
+          </a:effectRef>
+          <a:fontRef idx="minor">
+            <a:schemeClr val="lt1"/>
+          </a:fontRef>
+        </p:style>
+        <p:txBody>
+          <a:bodyPr rtlCol="0" anchor="ctr"/>
+          <a:lstStyle/>
+          <a:p>
+            <a:pPr algn="ctr"/>
+          </a:p>
+        </p:txBody>
+      </p:sp>
+      <p:sp>
+        <p:nvSpPr>
+          <p:cNvPr id="15" name="TextBox 14"/>
+          <p:cNvSpPr txBox="1"/>
+          <p:nvPr/>
+        </p:nvSpPr>
+        <p:spPr>
+          <a:xfrm>
+            <a:off x="4535424" y="2267712"/>
+            <a:ext cx="3054096" cy="219456"/>
+          </a:xfrm>
+          <a:prstGeom prst="rect">
+            <a:avLst/>
+          </a:prstGeom>
+          <a:noFill/>
+        </p:spPr>
+        <p:txBody>
+          <a:bodyPr wrap="square" anchor="ctr" lIns="0" rIns="0" tIns="0" bIns="0">
+            <a:spAutoFit/>
+          </a:bodyPr>
+          <a:lstStyle/>
+          <a:p>
+            <a:pPr algn="l">
+              <a:lnSpc>
+                <a:spcPct val="115000"/>
+              </a:lnSpc>
+            </a:pPr>
+            <a:r>
+              <a:rPr sz="900" b="1">
+                <a:solidFill>
+                  <a:srgbClr val="FFFFFF"/>
+                </a:solidFill>
+                <a:latin typeface="Hiragino Sans"/>
+                <a:ea typeface="Hiragino Sans"/>
+                <a:cs typeface="Hiragino Sans"/>
+              </a:rPr>
+              <a:t>江ノ電で通学</a:t>
+            </a:r>
+          </a:p>
+        </p:txBody>
+      </p:sp>
+      <p:sp>
+        <p:nvSpPr>
+          <p:cNvPr id="16" name="Rounded Rectangle 15"/>
+          <p:cNvSpPr/>
+          <p:nvPr/>
+        </p:nvSpPr>
+        <p:spPr>
+          <a:xfrm>
+            <a:off x="8010144" y="1170432"/>
+            <a:ext cx="3456432" cy="1444752"/>
+          </a:xfrm>
+          <a:prstGeom prst="roundRect">
+            <a:avLst>
+              <a:gd name="adj" fmla="val 6000"/>
+            </a:avLst>
+          </a:prstGeom>
+          <a:solidFill>
+            <a:srgbClr val="FFFFFF"/>
+          </a:solidFill>
+          <a:ln w="9525">
+            <a:solidFill>
+              <a:srgbClr val="D7DDE8"/>
+            </a:solidFill>
+          </a:ln>
+        </p:spPr>
+        <p:style>
+          <a:lnRef idx="1">
+            <a:schemeClr val="accent1"/>
+          </a:lnRef>
+          <a:fillRef idx="3">
+            <a:schemeClr val="accent1"/>
+          </a:fillRef>
+          <a:effectRef idx="2">
+            <a:schemeClr val="accent1"/>
+          </a:effectRef>
+          <a:fontRef idx="minor">
+            <a:schemeClr val="lt1"/>
+          </a:fontRef>
+        </p:style>
+        <p:txBody>
+          <a:bodyPr rtlCol="0" anchor="ctr"/>
+          <a:lstStyle/>
+          <a:p>
+            <a:pPr algn="ctr"/>
+          </a:p>
+        </p:txBody>
+      </p:sp>
+      <p:pic>
+        <p:nvPicPr>
+          <p:cNvPr id="17" name="Picture 16" descr="shichirinpic_card.jpg"/>
+          <p:cNvPicPr>
+            <a:picLocks noChangeAspect="1"/>
+          </p:cNvPicPr>
+          <p:nvPr/>
+        </p:nvPicPr>
+        <p:blipFill>
+          <a:blip r:embed="rId4"/>
+          <a:srcRect t="8751" b="8751"/>
+          <a:stretch>
+            <a:fillRect/>
+          </a:stretch>
+        </p:blipFill>
+        <p:spPr>
+          <a:xfrm>
+            <a:off x="8083296" y="1243584"/>
+            <a:ext cx="3310128" cy="1298448"/>
+          </a:xfrm>
+          <a:prstGeom prst="rect">
+            <a:avLst/>
+          </a:prstGeom>
+        </p:spPr>
+      </p:pic>
+      <p:sp>
+        <p:nvSpPr>
+          <p:cNvPr id="18" name="Rounded Rectangle 17"/>
+          <p:cNvSpPr/>
+          <p:nvPr/>
+        </p:nvSpPr>
+        <p:spPr>
+          <a:xfrm>
+            <a:off x="8083296" y="1243584"/>
+            <a:ext cx="3310128" cy="1298448"/>
+          </a:xfrm>
+          <a:prstGeom prst="roundRect">
+            <a:avLst>
+              <a:gd name="adj" fmla="val 4000"/>
+            </a:avLst>
+          </a:prstGeom>
+          <a:noFill/>
+          <a:ln w="12700">
+            <a:solidFill>
+              <a:srgbClr val="FFFFFF"/>
+            </a:solidFill>
+          </a:ln>
+        </p:spPr>
+        <p:style>
+          <a:lnRef idx="1">
+            <a:schemeClr val="accent1"/>
+          </a:lnRef>
+          <a:fillRef idx="3">
+            <a:schemeClr val="accent1"/>
+          </a:fillRef>
+          <a:effectRef idx="2">
+            <a:schemeClr val="accent1"/>
+          </a:effectRef>
+          <a:fontRef idx="minor">
+            <a:schemeClr val="lt1"/>
+          </a:fontRef>
+        </p:style>
+        <p:txBody>
+          <a:bodyPr rtlCol="0" anchor="ctr"/>
+          <a:lstStyle/>
+          <a:p>
+            <a:pPr algn="ctr"/>
+          </a:p>
+        </p:txBody>
+      </p:sp>
+      <p:sp>
+        <p:nvSpPr>
+          <p:cNvPr id="19" name="Rounded Rectangle 18"/>
+          <p:cNvSpPr/>
+          <p:nvPr/>
+        </p:nvSpPr>
+        <p:spPr>
+          <a:xfrm>
+            <a:off x="8083296" y="2212848"/>
+            <a:ext cx="3310128" cy="329184"/>
+          </a:xfrm>
+          <a:prstGeom prst="roundRect">
+            <a:avLst>
+              <a:gd name="adj" fmla="val 6000"/>
+            </a:avLst>
+          </a:prstGeom>
+          <a:solidFill>
+            <a:srgbClr val="0A162A"/>
+          </a:solidFill>
+          <a:ln>
+            <a:noFill/>
+          </a:ln>
+        </p:spPr>
+        <p:style>
+          <a:lnRef idx="1">
+            <a:schemeClr val="accent1"/>
+          </a:lnRef>
+          <a:fillRef idx="3">
+            <a:schemeClr val="accent1"/>
+          </a:fillRef>
+          <a:effectRef idx="2">
+            <a:schemeClr val="accent1"/>
+          </a:effectRef>
+          <a:fontRef idx="minor">
+            <a:schemeClr val="lt1"/>
+          </a:fontRef>
+        </p:style>
+        <p:txBody>
+          <a:bodyPr rtlCol="0" anchor="ctr"/>
+          <a:lstStyle/>
+          <a:p>
+            <a:pPr algn="ctr"/>
+          </a:p>
+        </p:txBody>
+      </p:sp>
+      <p:sp>
+        <p:nvSpPr>
+          <p:cNvPr id="20" name="TextBox 19"/>
+          <p:cNvSpPr txBox="1"/>
+          <p:nvPr/>
+        </p:nvSpPr>
+        <p:spPr>
+          <a:xfrm>
+            <a:off x="8211312" y="2267712"/>
+            <a:ext cx="3054096" cy="219456"/>
           </a:xfrm>
           <a:prstGeom prst="rect">
             <a:avLst/>
@@ -4517,13 +4577,633 @@
       </p:sp>
       <p:sp>
         <p:nvSpPr>
-          <p:cNvPr id="19" name="TextBox 18"/>
+          <p:cNvPr id="21" name="Rounded Rectangle 20"/>
+          <p:cNvSpPr/>
+          <p:nvPr/>
+        </p:nvSpPr>
+        <p:spPr>
+          <a:xfrm>
+            <a:off x="658368" y="2926080"/>
+            <a:ext cx="10863072" cy="512064"/>
+          </a:xfrm>
+          <a:prstGeom prst="roundRect">
+            <a:avLst>
+              <a:gd name="adj" fmla="val 6000"/>
+            </a:avLst>
+          </a:prstGeom>
+          <a:solidFill>
+            <a:srgbClr val="FFFFFF"/>
+          </a:solidFill>
+          <a:ln w="9525">
+            <a:solidFill>
+              <a:srgbClr val="D7DDE8"/>
+            </a:solidFill>
+          </a:ln>
+        </p:spPr>
+        <p:style>
+          <a:lnRef idx="1">
+            <a:schemeClr val="accent1"/>
+          </a:lnRef>
+          <a:fillRef idx="3">
+            <a:schemeClr val="accent1"/>
+          </a:fillRef>
+          <a:effectRef idx="2">
+            <a:schemeClr val="accent1"/>
+          </a:effectRef>
+          <a:fontRef idx="minor">
+            <a:schemeClr val="lt1"/>
+          </a:fontRef>
+        </p:style>
+        <p:txBody>
+          <a:bodyPr rtlCol="0" anchor="ctr"/>
+          <a:lstStyle/>
+          <a:p>
+            <a:pPr algn="ctr"/>
+          </a:p>
+        </p:txBody>
+      </p:sp>
+      <p:sp>
+        <p:nvSpPr>
+          <p:cNvPr id="22" name="Oval 21"/>
+          <p:cNvSpPr/>
+          <p:nvPr/>
+        </p:nvSpPr>
+        <p:spPr>
+          <a:xfrm>
+            <a:off x="896112" y="3099816"/>
+            <a:ext cx="146304" cy="146304"/>
+          </a:xfrm>
+          <a:prstGeom prst="ellipse">
+            <a:avLst/>
+          </a:prstGeom>
+          <a:solidFill>
+            <a:srgbClr val="2E8FA3"/>
+          </a:solidFill>
+          <a:ln w="9525">
+            <a:solidFill>
+              <a:srgbClr val="2E8FA3"/>
+            </a:solidFill>
+          </a:ln>
+        </p:spPr>
+        <p:style>
+          <a:lnRef idx="1">
+            <a:schemeClr val="accent1"/>
+          </a:lnRef>
+          <a:fillRef idx="3">
+            <a:schemeClr val="accent1"/>
+          </a:fillRef>
+          <a:effectRef idx="2">
+            <a:schemeClr val="accent1"/>
+          </a:effectRef>
+          <a:fontRef idx="minor">
+            <a:schemeClr val="lt1"/>
+          </a:fontRef>
+        </p:style>
+        <p:txBody>
+          <a:bodyPr rtlCol="0" anchor="ctr"/>
+          <a:lstStyle/>
+          <a:p>
+            <a:pPr algn="ctr"/>
+          </a:p>
+        </p:txBody>
+      </p:sp>
+      <p:sp>
+        <p:nvSpPr>
+          <p:cNvPr id="23" name="TextBox 22"/>
           <p:cNvSpPr txBox="1"/>
           <p:nvPr/>
         </p:nvSpPr>
         <p:spPr>
           <a:xfrm>
-            <a:off x="658368" y="6236208"/>
+            <a:off x="1207008" y="3008376"/>
+            <a:ext cx="9966960" cy="365760"/>
+          </a:xfrm>
+          <a:prstGeom prst="rect">
+            <a:avLst/>
+          </a:prstGeom>
+          <a:noFill/>
+        </p:spPr>
+        <p:txBody>
+          <a:bodyPr wrap="square" anchor="ctr" lIns="0" rIns="0" tIns="0" bIns="0">
+            <a:spAutoFit/>
+          </a:bodyPr>
+          <a:lstStyle/>
+          <a:p>
+            <a:pPr algn="l">
+              <a:lnSpc>
+                <a:spcPct val="102000"/>
+              </a:lnSpc>
+            </a:pPr>
+            <a:r>
+              <a:rPr sz="1140" b="1">
+                <a:solidFill>
+                  <a:srgbClr val="1A1A1A"/>
+                </a:solidFill>
+                <a:latin typeface="Hiragino Sans"/>
+                <a:ea typeface="Hiragino Sans"/>
+                <a:cs typeface="Hiragino Sans"/>
+              </a:rPr>
+              <a:t>教室や校庭から相模湾と江の島を一望。晴れた日は遠くに伊豆大島も見える、海沿いの坂の上の学校</a:t>
+            </a:r>
+          </a:p>
+        </p:txBody>
+      </p:sp>
+      <p:sp>
+        <p:nvSpPr>
+          <p:cNvPr id="24" name="Rounded Rectangle 23"/>
+          <p:cNvSpPr/>
+          <p:nvPr/>
+        </p:nvSpPr>
+        <p:spPr>
+          <a:xfrm>
+            <a:off x="658368" y="3529584"/>
+            <a:ext cx="10863072" cy="512064"/>
+          </a:xfrm>
+          <a:prstGeom prst="roundRect">
+            <a:avLst>
+              <a:gd name="adj" fmla="val 6000"/>
+            </a:avLst>
+          </a:prstGeom>
+          <a:solidFill>
+            <a:srgbClr val="FFFFFF"/>
+          </a:solidFill>
+          <a:ln w="9525">
+            <a:solidFill>
+              <a:srgbClr val="D7DDE8"/>
+            </a:solidFill>
+          </a:ln>
+        </p:spPr>
+        <p:style>
+          <a:lnRef idx="1">
+            <a:schemeClr val="accent1"/>
+          </a:lnRef>
+          <a:fillRef idx="3">
+            <a:schemeClr val="accent1"/>
+          </a:fillRef>
+          <a:effectRef idx="2">
+            <a:schemeClr val="accent1"/>
+          </a:effectRef>
+          <a:fontRef idx="minor">
+            <a:schemeClr val="lt1"/>
+          </a:fontRef>
+        </p:style>
+        <p:txBody>
+          <a:bodyPr rtlCol="0" anchor="ctr"/>
+          <a:lstStyle/>
+          <a:p>
+            <a:pPr algn="ctr"/>
+          </a:p>
+        </p:txBody>
+      </p:sp>
+      <p:sp>
+        <p:nvSpPr>
+          <p:cNvPr id="25" name="Oval 24"/>
+          <p:cNvSpPr/>
+          <p:nvPr/>
+        </p:nvSpPr>
+        <p:spPr>
+          <a:xfrm>
+            <a:off x="896112" y="3703320"/>
+            <a:ext cx="146304" cy="146304"/>
+          </a:xfrm>
+          <a:prstGeom prst="ellipse">
+            <a:avLst/>
+          </a:prstGeom>
+          <a:solidFill>
+            <a:srgbClr val="2E8FA3"/>
+          </a:solidFill>
+          <a:ln w="9525">
+            <a:solidFill>
+              <a:srgbClr val="2E8FA3"/>
+            </a:solidFill>
+          </a:ln>
+        </p:spPr>
+        <p:style>
+          <a:lnRef idx="1">
+            <a:schemeClr val="accent1"/>
+          </a:lnRef>
+          <a:fillRef idx="3">
+            <a:schemeClr val="accent1"/>
+          </a:fillRef>
+          <a:effectRef idx="2">
+            <a:schemeClr val="accent1"/>
+          </a:effectRef>
+          <a:fontRef idx="minor">
+            <a:schemeClr val="lt1"/>
+          </a:fontRef>
+        </p:style>
+        <p:txBody>
+          <a:bodyPr rtlCol="0" anchor="ctr"/>
+          <a:lstStyle/>
+          <a:p>
+            <a:pPr algn="ctr"/>
+          </a:p>
+        </p:txBody>
+      </p:sp>
+      <p:sp>
+        <p:nvSpPr>
+          <p:cNvPr id="26" name="TextBox 25"/>
+          <p:cNvSpPr txBox="1"/>
+          <p:nvPr/>
+        </p:nvSpPr>
+        <p:spPr>
+          <a:xfrm>
+            <a:off x="1207008" y="3611880"/>
+            <a:ext cx="9966960" cy="365760"/>
+          </a:xfrm>
+          <a:prstGeom prst="rect">
+            <a:avLst/>
+          </a:prstGeom>
+          <a:noFill/>
+        </p:spPr>
+        <p:txBody>
+          <a:bodyPr wrap="square" anchor="ctr" lIns="0" rIns="0" tIns="0" bIns="0">
+            <a:spAutoFit/>
+          </a:bodyPr>
+          <a:lstStyle/>
+          <a:p>
+            <a:pPr algn="l">
+              <a:lnSpc>
+                <a:spcPct val="102000"/>
+              </a:lnSpc>
+            </a:pPr>
+            <a:r>
+              <a:rPr sz="1140" b="1">
+                <a:solidFill>
+                  <a:srgbClr val="1A1A1A"/>
+                </a:solidFill>
+                <a:latin typeface="Hiragino Sans"/>
+                <a:ea typeface="Hiragino Sans"/>
+                <a:cs typeface="Hiragino Sans"/>
+              </a:rPr>
+              <a:t>体育祭「七里ンピック」はペアダンスが名物。海風の中、全校が一体になって盛り上がる</a:t>
+            </a:r>
+          </a:p>
+        </p:txBody>
+      </p:sp>
+      <p:sp>
+        <p:nvSpPr>
+          <p:cNvPr id="27" name="Rounded Rectangle 26"/>
+          <p:cNvSpPr/>
+          <p:nvPr/>
+        </p:nvSpPr>
+        <p:spPr>
+          <a:xfrm>
+            <a:off x="658368" y="4133087"/>
+            <a:ext cx="10863072" cy="512064"/>
+          </a:xfrm>
+          <a:prstGeom prst="roundRect">
+            <a:avLst>
+              <a:gd name="adj" fmla="val 6000"/>
+            </a:avLst>
+          </a:prstGeom>
+          <a:solidFill>
+            <a:srgbClr val="FFFFFF"/>
+          </a:solidFill>
+          <a:ln w="9525">
+            <a:solidFill>
+              <a:srgbClr val="D7DDE8"/>
+            </a:solidFill>
+          </a:ln>
+        </p:spPr>
+        <p:style>
+          <a:lnRef idx="1">
+            <a:schemeClr val="accent1"/>
+          </a:lnRef>
+          <a:fillRef idx="3">
+            <a:schemeClr val="accent1"/>
+          </a:fillRef>
+          <a:effectRef idx="2">
+            <a:schemeClr val="accent1"/>
+          </a:effectRef>
+          <a:fontRef idx="minor">
+            <a:schemeClr val="lt1"/>
+          </a:fontRef>
+        </p:style>
+        <p:txBody>
+          <a:bodyPr rtlCol="0" anchor="ctr"/>
+          <a:lstStyle/>
+          <a:p>
+            <a:pPr algn="ctr"/>
+          </a:p>
+        </p:txBody>
+      </p:sp>
+      <p:sp>
+        <p:nvSpPr>
+          <p:cNvPr id="28" name="Oval 27"/>
+          <p:cNvSpPr/>
+          <p:nvPr/>
+        </p:nvSpPr>
+        <p:spPr>
+          <a:xfrm>
+            <a:off x="896112" y="4306823"/>
+            <a:ext cx="146304" cy="146304"/>
+          </a:xfrm>
+          <a:prstGeom prst="ellipse">
+            <a:avLst/>
+          </a:prstGeom>
+          <a:solidFill>
+            <a:srgbClr val="2E8FA3"/>
+          </a:solidFill>
+          <a:ln w="9525">
+            <a:solidFill>
+              <a:srgbClr val="2E8FA3"/>
+            </a:solidFill>
+          </a:ln>
+        </p:spPr>
+        <p:style>
+          <a:lnRef idx="1">
+            <a:schemeClr val="accent1"/>
+          </a:lnRef>
+          <a:fillRef idx="3">
+            <a:schemeClr val="accent1"/>
+          </a:fillRef>
+          <a:effectRef idx="2">
+            <a:schemeClr val="accent1"/>
+          </a:effectRef>
+          <a:fontRef idx="minor">
+            <a:schemeClr val="lt1"/>
+          </a:fontRef>
+        </p:style>
+        <p:txBody>
+          <a:bodyPr rtlCol="0" anchor="ctr"/>
+          <a:lstStyle/>
+          <a:p>
+            <a:pPr algn="ctr"/>
+          </a:p>
+        </p:txBody>
+      </p:sp>
+      <p:sp>
+        <p:nvSpPr>
+          <p:cNvPr id="29" name="TextBox 28"/>
+          <p:cNvSpPr txBox="1"/>
+          <p:nvPr/>
+        </p:nvSpPr>
+        <p:spPr>
+          <a:xfrm>
+            <a:off x="1207008" y="4215383"/>
+            <a:ext cx="9966960" cy="365760"/>
+          </a:xfrm>
+          <a:prstGeom prst="rect">
+            <a:avLst/>
+          </a:prstGeom>
+          <a:noFill/>
+        </p:spPr>
+        <p:txBody>
+          <a:bodyPr wrap="square" anchor="ctr" lIns="0" rIns="0" tIns="0" bIns="0">
+            <a:spAutoFit/>
+          </a:bodyPr>
+          <a:lstStyle/>
+          <a:p>
+            <a:pPr algn="l">
+              <a:lnSpc>
+                <a:spcPct val="102000"/>
+              </a:lnSpc>
+            </a:pPr>
+            <a:r>
+              <a:rPr sz="1140" b="1">
+                <a:solidFill>
+                  <a:srgbClr val="1A1A1A"/>
+                </a:solidFill>
+                <a:latin typeface="Hiragino Sans"/>
+                <a:ea typeface="Hiragino Sans"/>
+                <a:cs typeface="Hiragino Sans"/>
+              </a:rPr>
+              <a:t>校訓は「自学自習・自主自律」。自分で考えて動く、のびのびした自由な空気</a:t>
+            </a:r>
+          </a:p>
+        </p:txBody>
+      </p:sp>
+      <p:sp>
+        <p:nvSpPr>
+          <p:cNvPr id="30" name="Rounded Rectangle 29"/>
+          <p:cNvSpPr/>
+          <p:nvPr/>
+        </p:nvSpPr>
+        <p:spPr>
+          <a:xfrm>
+            <a:off x="658368" y="4736592"/>
+            <a:ext cx="10863072" cy="512064"/>
+          </a:xfrm>
+          <a:prstGeom prst="roundRect">
+            <a:avLst>
+              <a:gd name="adj" fmla="val 6000"/>
+            </a:avLst>
+          </a:prstGeom>
+          <a:solidFill>
+            <a:srgbClr val="FFFFFF"/>
+          </a:solidFill>
+          <a:ln w="9525">
+            <a:solidFill>
+              <a:srgbClr val="D7DDE8"/>
+            </a:solidFill>
+          </a:ln>
+        </p:spPr>
+        <p:style>
+          <a:lnRef idx="1">
+            <a:schemeClr val="accent1"/>
+          </a:lnRef>
+          <a:fillRef idx="3">
+            <a:schemeClr val="accent1"/>
+          </a:fillRef>
+          <a:effectRef idx="2">
+            <a:schemeClr val="accent1"/>
+          </a:effectRef>
+          <a:fontRef idx="minor">
+            <a:schemeClr val="lt1"/>
+          </a:fontRef>
+        </p:style>
+        <p:txBody>
+          <a:bodyPr rtlCol="0" anchor="ctr"/>
+          <a:lstStyle/>
+          <a:p>
+            <a:pPr algn="ctr"/>
+          </a:p>
+        </p:txBody>
+      </p:sp>
+      <p:sp>
+        <p:nvSpPr>
+          <p:cNvPr id="31" name="Oval 30"/>
+          <p:cNvSpPr/>
+          <p:nvPr/>
+        </p:nvSpPr>
+        <p:spPr>
+          <a:xfrm>
+            <a:off x="896112" y="4910328"/>
+            <a:ext cx="146304" cy="146304"/>
+          </a:xfrm>
+          <a:prstGeom prst="ellipse">
+            <a:avLst/>
+          </a:prstGeom>
+          <a:solidFill>
+            <a:srgbClr val="2E8FA3"/>
+          </a:solidFill>
+          <a:ln w="9525">
+            <a:solidFill>
+              <a:srgbClr val="2E8FA3"/>
+            </a:solidFill>
+          </a:ln>
+        </p:spPr>
+        <p:style>
+          <a:lnRef idx="1">
+            <a:schemeClr val="accent1"/>
+          </a:lnRef>
+          <a:fillRef idx="3">
+            <a:schemeClr val="accent1"/>
+          </a:fillRef>
+          <a:effectRef idx="2">
+            <a:schemeClr val="accent1"/>
+          </a:effectRef>
+          <a:fontRef idx="minor">
+            <a:schemeClr val="lt1"/>
+          </a:fontRef>
+        </p:style>
+        <p:txBody>
+          <a:bodyPr rtlCol="0" anchor="ctr"/>
+          <a:lstStyle/>
+          <a:p>
+            <a:pPr algn="ctr"/>
+          </a:p>
+        </p:txBody>
+      </p:sp>
+      <p:sp>
+        <p:nvSpPr>
+          <p:cNvPr id="32" name="TextBox 31"/>
+          <p:cNvSpPr txBox="1"/>
+          <p:nvPr/>
+        </p:nvSpPr>
+        <p:spPr>
+          <a:xfrm>
+            <a:off x="1207008" y="4818888"/>
+            <a:ext cx="9966960" cy="365760"/>
+          </a:xfrm>
+          <a:prstGeom prst="rect">
+            <a:avLst/>
+          </a:prstGeom>
+          <a:noFill/>
+        </p:spPr>
+        <p:txBody>
+          <a:bodyPr wrap="square" anchor="ctr" lIns="0" rIns="0" tIns="0" bIns="0">
+            <a:spAutoFit/>
+          </a:bodyPr>
+          <a:lstStyle/>
+          <a:p>
+            <a:pPr algn="l">
+              <a:lnSpc>
+                <a:spcPct val="102000"/>
+              </a:lnSpc>
+            </a:pPr>
+            <a:r>
+              <a:rPr sz="1140" b="1">
+                <a:solidFill>
+                  <a:srgbClr val="1A1A1A"/>
+                </a:solidFill>
+                <a:latin typeface="Hiragino Sans"/>
+                <a:ea typeface="Hiragino Sans"/>
+                <a:cs typeface="Hiragino Sans"/>
+              </a:rPr>
+              <a:t>江ノ電の駅から徒歩すぐ、目の前は七里ヶ浜の海岸。通学路がもう湘南</a:t>
+            </a:r>
+          </a:p>
+        </p:txBody>
+      </p:sp>
+      <p:sp>
+        <p:nvSpPr>
+          <p:cNvPr id="33" name="Rounded Rectangle 32"/>
+          <p:cNvSpPr/>
+          <p:nvPr/>
+        </p:nvSpPr>
+        <p:spPr>
+          <a:xfrm>
+            <a:off x="658368" y="5559552"/>
+            <a:ext cx="6217920" cy="420624"/>
+          </a:xfrm>
+          <a:prstGeom prst="roundRect">
+            <a:avLst>
+              <a:gd name="adj" fmla="val 6000"/>
+            </a:avLst>
+          </a:prstGeom>
+          <a:solidFill>
+            <a:srgbClr val="FFFFFF"/>
+          </a:solidFill>
+          <a:ln w="9525">
+            <a:solidFill>
+              <a:srgbClr val="D7DDE8"/>
+            </a:solidFill>
+          </a:ln>
+        </p:spPr>
+        <p:style>
+          <a:lnRef idx="1">
+            <a:schemeClr val="accent1"/>
+          </a:lnRef>
+          <a:fillRef idx="3">
+            <a:schemeClr val="accent1"/>
+          </a:fillRef>
+          <a:effectRef idx="2">
+            <a:schemeClr val="accent1"/>
+          </a:effectRef>
+          <a:fontRef idx="minor">
+            <a:schemeClr val="lt1"/>
+          </a:fontRef>
+        </p:style>
+        <p:txBody>
+          <a:bodyPr rtlCol="0" anchor="ctr"/>
+          <a:lstStyle/>
+          <a:p>
+            <a:pPr algn="ctr"/>
+          </a:p>
+        </p:txBody>
+      </p:sp>
+      <p:sp>
+        <p:nvSpPr>
+          <p:cNvPr id="34" name="TextBox 33"/>
+          <p:cNvSpPr txBox="1"/>
+          <p:nvPr/>
+        </p:nvSpPr>
+        <p:spPr>
+          <a:xfrm>
+            <a:off x="932688" y="5687568"/>
+            <a:ext cx="5669280" cy="182880"/>
+          </a:xfrm>
+          <a:prstGeom prst="rect">
+            <a:avLst/>
+          </a:prstGeom>
+          <a:noFill/>
+        </p:spPr>
+        <p:txBody>
+          <a:bodyPr wrap="square" anchor="ctr" lIns="0" rIns="0" tIns="0" bIns="0">
+            <a:spAutoFit/>
+          </a:bodyPr>
+          <a:lstStyle/>
+          <a:p>
+            <a:pPr algn="l">
+              <a:lnSpc>
+                <a:spcPct val="115000"/>
+              </a:lnSpc>
+            </a:pPr>
+            <a:r>
+              <a:rPr sz="1300" b="1">
+                <a:solidFill>
+                  <a:srgbClr val="1E6575"/>
+                </a:solidFill>
+                <a:latin typeface="Hiragino Sans"/>
+                <a:ea typeface="Hiragino Sans"/>
+                <a:cs typeface="Hiragino Sans"/>
+              </a:rPr>
+              <a:t>江ノ電「七里ヶ浜」駅から徒歩すぐ</a:t>
+            </a:r>
+          </a:p>
+        </p:txBody>
+      </p:sp>
+      <p:sp>
+        <p:nvSpPr>
+          <p:cNvPr id="35" name="TextBox 34"/>
+          <p:cNvSpPr txBox="1"/>
+          <p:nvPr/>
+        </p:nvSpPr>
+        <p:spPr>
+          <a:xfrm>
+            <a:off x="658368" y="6327648"/>
             <a:ext cx="9875520" cy="201168"/>
           </a:xfrm>
           <a:prstGeom prst="rect">
@@ -4576,7 +5256,7 @@
       <p:grpSpPr/>
       <p:pic>
         <p:nvPicPr>
-          <p:cNvPr id="2" name="Picture 1" descr="wiki_campus_hero.jpg"/>
+          <p:cNvPr id="2" name="Picture 1" descr="wiki_fumikiri_hero.jpg"/>
           <p:cNvPicPr>
             <a:picLocks noChangeAspect="1"/>
           </p:cNvPicPr>
@@ -4584,7 +5264,7 @@
         </p:nvPicPr>
         <p:blipFill>
           <a:blip r:embed="rId2"/>
-          <a:srcRect t="12499" b="12499"/>
+          <a:srcRect l="14001" r="14001"/>
           <a:stretch>
             <a:fillRect/>
           </a:stretch>
@@ -4848,7 +5528,7 @@
                 <a:ea typeface="Hiragino Sans"/>
                 <a:cs typeface="Hiragino Sans"/>
               </a:rPr>
-              <a:t>「青春日本一」を名乗る、自由な学校</a:t>
+              <a:t>江ノ電の踏切の、すぐそば。</a:t>
             </a:r>
           </a:p>
         </p:txBody>
@@ -5041,24 +5721,26 @@
       </p:sp>
       <p:sp>
         <p:nvSpPr>
-          <p:cNvPr id="6" name="Oval 5"/>
+          <p:cNvPr id="6" name="Rounded Rectangle 5"/>
           <p:cNvSpPr/>
           <p:nvPr/>
         </p:nvSpPr>
         <p:spPr>
           <a:xfrm>
-            <a:off x="658368" y="1600200"/>
-            <a:ext cx="182880" cy="182880"/>
-          </a:xfrm>
-          <a:prstGeom prst="ellipse">
-            <a:avLst/>
-          </a:prstGeom>
-          <a:solidFill>
-            <a:srgbClr val="2E8FA3"/>
+            <a:off x="658368" y="1170432"/>
+            <a:ext cx="7315200" cy="1847088"/>
+          </a:xfrm>
+          <a:prstGeom prst="roundRect">
+            <a:avLst>
+              <a:gd name="adj" fmla="val 6000"/>
+            </a:avLst>
+          </a:prstGeom>
+          <a:solidFill>
+            <a:srgbClr val="FFFFFF"/>
           </a:solidFill>
           <a:ln w="9525">
             <a:solidFill>
-              <a:srgbClr val="2E8FA3"/>
+              <a:srgbClr val="D7DDE8"/>
             </a:solidFill>
           </a:ln>
         </p:spPr>
@@ -5084,357 +5766,9 @@
           </a:p>
         </p:txBody>
       </p:sp>
-      <p:sp>
-        <p:nvSpPr>
-          <p:cNvPr id="7" name="TextBox 6"/>
-          <p:cNvSpPr txBox="1"/>
-          <p:nvPr/>
-        </p:nvSpPr>
-        <p:spPr>
-          <a:xfrm>
-            <a:off x="1170432" y="1481328"/>
-            <a:ext cx="5806440" cy="621792"/>
-          </a:xfrm>
-          <a:prstGeom prst="rect">
-            <a:avLst/>
-          </a:prstGeom>
-          <a:noFill/>
-        </p:spPr>
-        <p:txBody>
-          <a:bodyPr wrap="square" anchor="t" lIns="0" rIns="0" tIns="0" bIns="0">
-            <a:spAutoFit/>
-          </a:bodyPr>
-          <a:lstStyle/>
-          <a:p>
-            <a:pPr algn="l">
-              <a:lnSpc>
-                <a:spcPct val="115000"/>
-              </a:lnSpc>
-            </a:pPr>
-            <a:r>
-              <a:rPr sz="1700" b="1">
-                <a:solidFill>
-                  <a:srgbClr val="1A1A1A"/>
-                </a:solidFill>
-                <a:latin typeface="Hiragino Sans"/>
-                <a:ea typeface="Hiragino Sans"/>
-                <a:cs typeface="Hiragino Sans"/>
-              </a:rPr>
-              <a:t>江ノ電沿線。晴れた日は校内から富士山が見える</a:t>
-            </a:r>
-          </a:p>
-        </p:txBody>
-      </p:sp>
-      <p:sp>
-        <p:nvSpPr>
-          <p:cNvPr id="8" name="Oval 7"/>
-          <p:cNvSpPr/>
-          <p:nvPr/>
-        </p:nvSpPr>
-        <p:spPr>
-          <a:xfrm>
-            <a:off x="658368" y="2542032"/>
-            <a:ext cx="182880" cy="182880"/>
-          </a:xfrm>
-          <a:prstGeom prst="ellipse">
-            <a:avLst/>
-          </a:prstGeom>
-          <a:solidFill>
-            <a:srgbClr val="2E8FA3"/>
-          </a:solidFill>
-          <a:ln w="9525">
-            <a:solidFill>
-              <a:srgbClr val="2E8FA3"/>
-            </a:solidFill>
-          </a:ln>
-        </p:spPr>
-        <p:style>
-          <a:lnRef idx="1">
-            <a:schemeClr val="accent1"/>
-          </a:lnRef>
-          <a:fillRef idx="3">
-            <a:schemeClr val="accent1"/>
-          </a:fillRef>
-          <a:effectRef idx="2">
-            <a:schemeClr val="accent1"/>
-          </a:effectRef>
-          <a:fontRef idx="minor">
-            <a:schemeClr val="lt1"/>
-          </a:fontRef>
-        </p:style>
-        <p:txBody>
-          <a:bodyPr rtlCol="0" anchor="ctr"/>
-          <a:lstStyle/>
-          <a:p>
-            <a:pPr algn="ctr"/>
-          </a:p>
-        </p:txBody>
-      </p:sp>
-      <p:sp>
-        <p:nvSpPr>
-          <p:cNvPr id="9" name="TextBox 8"/>
-          <p:cNvSpPr txBox="1"/>
-          <p:nvPr/>
-        </p:nvSpPr>
-        <p:spPr>
-          <a:xfrm>
-            <a:off x="1170432" y="2423160"/>
-            <a:ext cx="5806440" cy="621792"/>
-          </a:xfrm>
-          <a:prstGeom prst="rect">
-            <a:avLst/>
-          </a:prstGeom>
-          <a:noFill/>
-        </p:spPr>
-        <p:txBody>
-          <a:bodyPr wrap="square" anchor="t" lIns="0" rIns="0" tIns="0" bIns="0">
-            <a:spAutoFit/>
-          </a:bodyPr>
-          <a:lstStyle/>
-          <a:p>
-            <a:pPr algn="l">
-              <a:lnSpc>
-                <a:spcPct val="115000"/>
-              </a:lnSpc>
-            </a:pPr>
-            <a:r>
-              <a:rPr sz="1700" b="1">
-                <a:solidFill>
-                  <a:srgbClr val="1A1A1A"/>
-                </a:solidFill>
-                <a:latin typeface="Hiragino Sans"/>
-                <a:ea typeface="Hiragino Sans"/>
-                <a:cs typeface="Hiragino Sans"/>
-              </a:rPr>
-              <a:t>「自主自律」を大事に、生徒主体でいろいろ動く校風</a:t>
-            </a:r>
-          </a:p>
-        </p:txBody>
-      </p:sp>
-      <p:sp>
-        <p:nvSpPr>
-          <p:cNvPr id="10" name="Oval 9"/>
-          <p:cNvSpPr/>
-          <p:nvPr/>
-        </p:nvSpPr>
-        <p:spPr>
-          <a:xfrm>
-            <a:off x="658368" y="3483864"/>
-            <a:ext cx="182880" cy="182880"/>
-          </a:xfrm>
-          <a:prstGeom prst="ellipse">
-            <a:avLst/>
-          </a:prstGeom>
-          <a:solidFill>
-            <a:srgbClr val="2E8FA3"/>
-          </a:solidFill>
-          <a:ln w="9525">
-            <a:solidFill>
-              <a:srgbClr val="2E8FA3"/>
-            </a:solidFill>
-          </a:ln>
-        </p:spPr>
-        <p:style>
-          <a:lnRef idx="1">
-            <a:schemeClr val="accent1"/>
-          </a:lnRef>
-          <a:fillRef idx="3">
-            <a:schemeClr val="accent1"/>
-          </a:fillRef>
-          <a:effectRef idx="2">
-            <a:schemeClr val="accent1"/>
-          </a:effectRef>
-          <a:fontRef idx="minor">
-            <a:schemeClr val="lt1"/>
-          </a:fontRef>
-        </p:style>
-        <p:txBody>
-          <a:bodyPr rtlCol="0" anchor="ctr"/>
-          <a:lstStyle/>
-          <a:p>
-            <a:pPr algn="ctr"/>
-          </a:p>
-        </p:txBody>
-      </p:sp>
-      <p:sp>
-        <p:nvSpPr>
-          <p:cNvPr id="11" name="TextBox 10"/>
-          <p:cNvSpPr txBox="1"/>
-          <p:nvPr/>
-        </p:nvSpPr>
-        <p:spPr>
-          <a:xfrm>
-            <a:off x="1170432" y="3364992"/>
-            <a:ext cx="5806440" cy="621792"/>
-          </a:xfrm>
-          <a:prstGeom prst="rect">
-            <a:avLst/>
-          </a:prstGeom>
-          <a:noFill/>
-        </p:spPr>
-        <p:txBody>
-          <a:bodyPr wrap="square" anchor="t" lIns="0" rIns="0" tIns="0" bIns="0">
-            <a:spAutoFit/>
-          </a:bodyPr>
-          <a:lstStyle/>
-          <a:p>
-            <a:pPr algn="l">
-              <a:lnSpc>
-                <a:spcPct val="115000"/>
-              </a:lnSpc>
-            </a:pPr>
-            <a:r>
-              <a:rPr sz="1700" b="1">
-                <a:solidFill>
-                  <a:srgbClr val="1A1A1A"/>
-                </a:solidFill>
-                <a:latin typeface="Hiragino Sans"/>
-                <a:ea typeface="Hiragino Sans"/>
-                <a:cs typeface="Hiragino Sans"/>
-              </a:rPr>
-              <a:t>ダンス部「カマダン」が名物。部活も行事もエネルギッシュ</a:t>
-            </a:r>
-          </a:p>
-        </p:txBody>
-      </p:sp>
-      <p:sp>
-        <p:nvSpPr>
-          <p:cNvPr id="12" name="Rounded Rectangle 11"/>
-          <p:cNvSpPr/>
-          <p:nvPr/>
-        </p:nvSpPr>
-        <p:spPr>
-          <a:xfrm>
-            <a:off x="658368" y="4709160"/>
-            <a:ext cx="6217920" cy="566928"/>
-          </a:xfrm>
-          <a:prstGeom prst="roundRect">
-            <a:avLst>
-              <a:gd name="adj" fmla="val 6000"/>
-            </a:avLst>
-          </a:prstGeom>
-          <a:solidFill>
-            <a:srgbClr val="FFFFFF"/>
-          </a:solidFill>
-          <a:ln w="9525">
-            <a:solidFill>
-              <a:srgbClr val="D7DDE8"/>
-            </a:solidFill>
-          </a:ln>
-        </p:spPr>
-        <p:style>
-          <a:lnRef idx="1">
-            <a:schemeClr val="accent1"/>
-          </a:lnRef>
-          <a:fillRef idx="3">
-            <a:schemeClr val="accent1"/>
-          </a:fillRef>
-          <a:effectRef idx="2">
-            <a:schemeClr val="accent1"/>
-          </a:effectRef>
-          <a:fontRef idx="minor">
-            <a:schemeClr val="lt1"/>
-          </a:fontRef>
-        </p:style>
-        <p:txBody>
-          <a:bodyPr rtlCol="0" anchor="ctr"/>
-          <a:lstStyle/>
-          <a:p>
-            <a:pPr algn="ctr"/>
-          </a:p>
-        </p:txBody>
-      </p:sp>
-      <p:sp>
-        <p:nvSpPr>
-          <p:cNvPr id="13" name="TextBox 12"/>
-          <p:cNvSpPr txBox="1"/>
-          <p:nvPr/>
-        </p:nvSpPr>
-        <p:spPr>
-          <a:xfrm>
-            <a:off x="932688" y="4882896"/>
-            <a:ext cx="5669280" cy="219456"/>
-          </a:xfrm>
-          <a:prstGeom prst="rect">
-            <a:avLst/>
-          </a:prstGeom>
-          <a:noFill/>
-        </p:spPr>
-        <p:txBody>
-          <a:bodyPr wrap="square" anchor="ctr" lIns="0" rIns="0" tIns="0" bIns="0">
-            <a:spAutoFit/>
-          </a:bodyPr>
-          <a:lstStyle/>
-          <a:p>
-            <a:pPr algn="l">
-              <a:lnSpc>
-                <a:spcPct val="115000"/>
-              </a:lnSpc>
-            </a:pPr>
-            <a:r>
-              <a:rPr sz="1500" b="1">
-                <a:solidFill>
-                  <a:srgbClr val="1E6575"/>
-                </a:solidFill>
-                <a:latin typeface="Hiragino Sans"/>
-                <a:ea typeface="Hiragino Sans"/>
-                <a:cs typeface="Hiragino Sans"/>
-              </a:rPr>
-              <a:t>七里ヶ浜と同じ江ノ電沿線エリア（鎌倉・大船から）</a:t>
-            </a:r>
-          </a:p>
-        </p:txBody>
-      </p:sp>
-      <p:sp>
-        <p:nvSpPr>
-          <p:cNvPr id="14" name="Rounded Rectangle 13"/>
-          <p:cNvSpPr/>
-          <p:nvPr/>
-        </p:nvSpPr>
-        <p:spPr>
-          <a:xfrm>
-            <a:off x="7360920" y="1335024"/>
-            <a:ext cx="4224528" cy="2578608"/>
-          </a:xfrm>
-          <a:prstGeom prst="roundRect">
-            <a:avLst>
-              <a:gd name="adj" fmla="val 6000"/>
-            </a:avLst>
-          </a:prstGeom>
-          <a:solidFill>
-            <a:srgbClr val="FFFFFF"/>
-          </a:solidFill>
-          <a:ln w="9525">
-            <a:solidFill>
-              <a:srgbClr val="D7DDE8"/>
-            </a:solidFill>
-          </a:ln>
-        </p:spPr>
-        <p:style>
-          <a:lnRef idx="1">
-            <a:schemeClr val="accent1"/>
-          </a:lnRef>
-          <a:fillRef idx="3">
-            <a:schemeClr val="accent1"/>
-          </a:fillRef>
-          <a:effectRef idx="2">
-            <a:schemeClr val="accent1"/>
-          </a:effectRef>
-          <a:fontRef idx="minor">
-            <a:schemeClr val="lt1"/>
-          </a:fontRef>
-        </p:style>
-        <p:txBody>
-          <a:bodyPr rtlCol="0" anchor="ctr"/>
-          <a:lstStyle/>
-          <a:p>
-            <a:pPr algn="ctr"/>
-          </a:p>
-        </p:txBody>
-      </p:sp>
       <p:pic>
         <p:nvPicPr>
-          <p:cNvPr id="15" name="Picture 14" descr="wiki_campus_hero.jpg"/>
+          <p:cNvPr id="7" name="Picture 6" descr="wiki_campus_hero.jpg"/>
           <p:cNvPicPr>
             <a:picLocks noChangeAspect="1"/>
           </p:cNvPicPr>
@@ -5442,15 +5776,15 @@
         </p:nvPicPr>
         <p:blipFill>
           <a:blip r:embed="rId2"/>
-          <a:srcRect t="10239" b="10239"/>
+          <a:srcRect t="34184" b="34184"/>
           <a:stretch>
             <a:fillRect/>
           </a:stretch>
         </p:blipFill>
         <p:spPr>
           <a:xfrm>
-            <a:off x="7434072" y="1408176"/>
-            <a:ext cx="4078224" cy="2432304"/>
+            <a:off x="731520" y="1243584"/>
+            <a:ext cx="7168896" cy="1700784"/>
           </a:xfrm>
           <a:prstGeom prst="rect">
             <a:avLst/>
@@ -5459,14 +5793,14 @@
       </p:pic>
       <p:sp>
         <p:nvSpPr>
-          <p:cNvPr id="16" name="Rounded Rectangle 15"/>
+          <p:cNvPr id="8" name="Rounded Rectangle 7"/>
           <p:cNvSpPr/>
           <p:nvPr/>
         </p:nvSpPr>
         <p:spPr>
           <a:xfrm>
-            <a:off x="7434072" y="1408176"/>
-            <a:ext cx="4078224" cy="2432304"/>
+            <a:off x="731520" y="1243584"/>
+            <a:ext cx="7168896" cy="1700784"/>
           </a:xfrm>
           <a:prstGeom prst="roundRect">
             <a:avLst>
@@ -5504,14 +5838,14 @@
       </p:sp>
       <p:sp>
         <p:nvSpPr>
-          <p:cNvPr id="17" name="Rounded Rectangle 16"/>
+          <p:cNvPr id="9" name="Rounded Rectangle 8"/>
           <p:cNvSpPr/>
           <p:nvPr/>
         </p:nvSpPr>
         <p:spPr>
           <a:xfrm>
-            <a:off x="7434072" y="3511296"/>
-            <a:ext cx="4078224" cy="329184"/>
+            <a:off x="731520" y="2615184"/>
+            <a:ext cx="7168896" cy="329184"/>
           </a:xfrm>
           <a:prstGeom prst="roundRect">
             <a:avLst>
@@ -5549,14 +5883,14 @@
       </p:sp>
       <p:sp>
         <p:nvSpPr>
-          <p:cNvPr id="18" name="TextBox 17"/>
+          <p:cNvPr id="10" name="TextBox 9"/>
           <p:cNvSpPr txBox="1"/>
           <p:nvPr/>
         </p:nvSpPr>
         <p:spPr>
           <a:xfrm>
-            <a:off x="7562088" y="3566160"/>
-            <a:ext cx="3822192" cy="219456"/>
+            <a:off x="859536" y="2670048"/>
+            <a:ext cx="6912864" cy="219456"/>
           </a:xfrm>
           <a:prstGeom prst="rect">
             <a:avLst/>
@@ -5590,13 +5924,633 @@
       </p:sp>
       <p:sp>
         <p:nvSpPr>
+          <p:cNvPr id="11" name="Rounded Rectangle 10"/>
+          <p:cNvSpPr/>
+          <p:nvPr/>
+        </p:nvSpPr>
+        <p:spPr>
+          <a:xfrm>
+            <a:off x="658368" y="3182112"/>
+            <a:ext cx="10863072" cy="566928"/>
+          </a:xfrm>
+          <a:prstGeom prst="roundRect">
+            <a:avLst>
+              <a:gd name="adj" fmla="val 6000"/>
+            </a:avLst>
+          </a:prstGeom>
+          <a:solidFill>
+            <a:srgbClr val="FFFFFF"/>
+          </a:solidFill>
+          <a:ln w="9525">
+            <a:solidFill>
+              <a:srgbClr val="D7DDE8"/>
+            </a:solidFill>
+          </a:ln>
+        </p:spPr>
+        <p:style>
+          <a:lnRef idx="1">
+            <a:schemeClr val="accent1"/>
+          </a:lnRef>
+          <a:fillRef idx="3">
+            <a:schemeClr val="accent1"/>
+          </a:fillRef>
+          <a:effectRef idx="2">
+            <a:schemeClr val="accent1"/>
+          </a:effectRef>
+          <a:fontRef idx="minor">
+            <a:schemeClr val="lt1"/>
+          </a:fontRef>
+        </p:style>
+        <p:txBody>
+          <a:bodyPr rtlCol="0" anchor="ctr"/>
+          <a:lstStyle/>
+          <a:p>
+            <a:pPr algn="ctr"/>
+          </a:p>
+        </p:txBody>
+      </p:sp>
+      <p:sp>
+        <p:nvSpPr>
+          <p:cNvPr id="12" name="Oval 11"/>
+          <p:cNvSpPr/>
+          <p:nvPr/>
+        </p:nvSpPr>
+        <p:spPr>
+          <a:xfrm>
+            <a:off x="896112" y="3383280"/>
+            <a:ext cx="146304" cy="146304"/>
+          </a:xfrm>
+          <a:prstGeom prst="ellipse">
+            <a:avLst/>
+          </a:prstGeom>
+          <a:solidFill>
+            <a:srgbClr val="2E8FA3"/>
+          </a:solidFill>
+          <a:ln w="9525">
+            <a:solidFill>
+              <a:srgbClr val="2E8FA3"/>
+            </a:solidFill>
+          </a:ln>
+        </p:spPr>
+        <p:style>
+          <a:lnRef idx="1">
+            <a:schemeClr val="accent1"/>
+          </a:lnRef>
+          <a:fillRef idx="3">
+            <a:schemeClr val="accent1"/>
+          </a:fillRef>
+          <a:effectRef idx="2">
+            <a:schemeClr val="accent1"/>
+          </a:effectRef>
+          <a:fontRef idx="minor">
+            <a:schemeClr val="lt1"/>
+          </a:fontRef>
+        </p:style>
+        <p:txBody>
+          <a:bodyPr rtlCol="0" anchor="ctr"/>
+          <a:lstStyle/>
+          <a:p>
+            <a:pPr algn="ctr"/>
+          </a:p>
+        </p:txBody>
+      </p:sp>
+      <p:sp>
+        <p:nvSpPr>
+          <p:cNvPr id="13" name="TextBox 12"/>
+          <p:cNvSpPr txBox="1"/>
+          <p:nvPr/>
+        </p:nvSpPr>
+        <p:spPr>
+          <a:xfrm>
+            <a:off x="1207008" y="3255264"/>
+            <a:ext cx="9966960" cy="420624"/>
+          </a:xfrm>
+          <a:prstGeom prst="rect">
+            <a:avLst/>
+          </a:prstGeom>
+          <a:noFill/>
+        </p:spPr>
+        <p:txBody>
+          <a:bodyPr wrap="square" anchor="ctr" lIns="0" rIns="0" tIns="0" bIns="0">
+            <a:spAutoFit/>
+          </a:bodyPr>
+          <a:lstStyle/>
+          <a:p>
+            <a:pPr algn="l">
+              <a:lnSpc>
+                <a:spcPct val="98000"/>
+              </a:lnSpc>
+            </a:pPr>
+            <a:r>
+              <a:rPr sz="1040" b="1">
+                <a:solidFill>
+                  <a:srgbClr val="1A1A1A"/>
+                </a:solidFill>
+                <a:latin typeface="Hiragino Sans"/>
+                <a:ea typeface="Hiragino Sans"/>
+                <a:cs typeface="Hiragino Sans"/>
+              </a:rPr>
+              <a:t>江ノ電「鎌倉高校前」駅の踏切は、海と江の島が広がる超有名スポット（アニメの聖地で観光客も訪れる）</a:t>
+            </a:r>
+          </a:p>
+        </p:txBody>
+      </p:sp>
+      <p:sp>
+        <p:nvSpPr>
+          <p:cNvPr id="14" name="Rounded Rectangle 13"/>
+          <p:cNvSpPr/>
+          <p:nvPr/>
+        </p:nvSpPr>
+        <p:spPr>
+          <a:xfrm>
+            <a:off x="658368" y="3767328"/>
+            <a:ext cx="10863072" cy="566928"/>
+          </a:xfrm>
+          <a:prstGeom prst="roundRect">
+            <a:avLst>
+              <a:gd name="adj" fmla="val 6000"/>
+            </a:avLst>
+          </a:prstGeom>
+          <a:solidFill>
+            <a:srgbClr val="FFFFFF"/>
+          </a:solidFill>
+          <a:ln w="9525">
+            <a:solidFill>
+              <a:srgbClr val="D7DDE8"/>
+            </a:solidFill>
+          </a:ln>
+        </p:spPr>
+        <p:style>
+          <a:lnRef idx="1">
+            <a:schemeClr val="accent1"/>
+          </a:lnRef>
+          <a:fillRef idx="3">
+            <a:schemeClr val="accent1"/>
+          </a:fillRef>
+          <a:effectRef idx="2">
+            <a:schemeClr val="accent1"/>
+          </a:effectRef>
+          <a:fontRef idx="minor">
+            <a:schemeClr val="lt1"/>
+          </a:fontRef>
+        </p:style>
+        <p:txBody>
+          <a:bodyPr rtlCol="0" anchor="ctr"/>
+          <a:lstStyle/>
+          <a:p>
+            <a:pPr algn="ctr"/>
+          </a:p>
+        </p:txBody>
+      </p:sp>
+      <p:sp>
+        <p:nvSpPr>
+          <p:cNvPr id="15" name="Oval 14"/>
+          <p:cNvSpPr/>
+          <p:nvPr/>
+        </p:nvSpPr>
+        <p:spPr>
+          <a:xfrm>
+            <a:off x="896112" y="3968496"/>
+            <a:ext cx="146304" cy="146304"/>
+          </a:xfrm>
+          <a:prstGeom prst="ellipse">
+            <a:avLst/>
+          </a:prstGeom>
+          <a:solidFill>
+            <a:srgbClr val="2E8FA3"/>
+          </a:solidFill>
+          <a:ln w="9525">
+            <a:solidFill>
+              <a:srgbClr val="2E8FA3"/>
+            </a:solidFill>
+          </a:ln>
+        </p:spPr>
+        <p:style>
+          <a:lnRef idx="1">
+            <a:schemeClr val="accent1"/>
+          </a:lnRef>
+          <a:fillRef idx="3">
+            <a:schemeClr val="accent1"/>
+          </a:fillRef>
+          <a:effectRef idx="2">
+            <a:schemeClr val="accent1"/>
+          </a:effectRef>
+          <a:fontRef idx="minor">
+            <a:schemeClr val="lt1"/>
+          </a:fontRef>
+        </p:style>
+        <p:txBody>
+          <a:bodyPr rtlCol="0" anchor="ctr"/>
+          <a:lstStyle/>
+          <a:p>
+            <a:pPr algn="ctr"/>
+          </a:p>
+        </p:txBody>
+      </p:sp>
+      <p:sp>
+        <p:nvSpPr>
+          <p:cNvPr id="16" name="TextBox 15"/>
+          <p:cNvSpPr txBox="1"/>
+          <p:nvPr/>
+        </p:nvSpPr>
+        <p:spPr>
+          <a:xfrm>
+            <a:off x="1207008" y="3840480"/>
+            <a:ext cx="9966960" cy="420624"/>
+          </a:xfrm>
+          <a:prstGeom prst="rect">
+            <a:avLst/>
+          </a:prstGeom>
+          <a:noFill/>
+        </p:spPr>
+        <p:txBody>
+          <a:bodyPr wrap="square" anchor="ctr" lIns="0" rIns="0" tIns="0" bIns="0">
+            <a:spAutoFit/>
+          </a:bodyPr>
+          <a:lstStyle/>
+          <a:p>
+            <a:pPr algn="l">
+              <a:lnSpc>
+                <a:spcPct val="98000"/>
+              </a:lnSpc>
+            </a:pPr>
+            <a:r>
+              <a:rPr sz="1040" b="1">
+                <a:solidFill>
+                  <a:srgbClr val="1A1A1A"/>
+                </a:solidFill>
+                <a:latin typeface="Hiragino Sans"/>
+                <a:ea typeface="Hiragino Sans"/>
+                <a:cs typeface="Hiragino Sans"/>
+              </a:rPr>
+              <a:t>晴れた日は校内から富士山が見える、海沿いの高台に建つ</a:t>
+            </a:r>
+          </a:p>
+        </p:txBody>
+      </p:sp>
+      <p:sp>
+        <p:nvSpPr>
+          <p:cNvPr id="17" name="Rounded Rectangle 16"/>
+          <p:cNvSpPr/>
+          <p:nvPr/>
+        </p:nvSpPr>
+        <p:spPr>
+          <a:xfrm>
+            <a:off x="658368" y="4352544"/>
+            <a:ext cx="10863072" cy="566928"/>
+          </a:xfrm>
+          <a:prstGeom prst="roundRect">
+            <a:avLst>
+              <a:gd name="adj" fmla="val 6000"/>
+            </a:avLst>
+          </a:prstGeom>
+          <a:solidFill>
+            <a:srgbClr val="FFFFFF"/>
+          </a:solidFill>
+          <a:ln w="9525">
+            <a:solidFill>
+              <a:srgbClr val="D7DDE8"/>
+            </a:solidFill>
+          </a:ln>
+        </p:spPr>
+        <p:style>
+          <a:lnRef idx="1">
+            <a:schemeClr val="accent1"/>
+          </a:lnRef>
+          <a:fillRef idx="3">
+            <a:schemeClr val="accent1"/>
+          </a:fillRef>
+          <a:effectRef idx="2">
+            <a:schemeClr val="accent1"/>
+          </a:effectRef>
+          <a:fontRef idx="minor">
+            <a:schemeClr val="lt1"/>
+          </a:fontRef>
+        </p:style>
+        <p:txBody>
+          <a:bodyPr rtlCol="0" anchor="ctr"/>
+          <a:lstStyle/>
+          <a:p>
+            <a:pPr algn="ctr"/>
+          </a:p>
+        </p:txBody>
+      </p:sp>
+      <p:sp>
+        <p:nvSpPr>
+          <p:cNvPr id="18" name="Oval 17"/>
+          <p:cNvSpPr/>
+          <p:nvPr/>
+        </p:nvSpPr>
+        <p:spPr>
+          <a:xfrm>
+            <a:off x="896112" y="4553712"/>
+            <a:ext cx="146304" cy="146304"/>
+          </a:xfrm>
+          <a:prstGeom prst="ellipse">
+            <a:avLst/>
+          </a:prstGeom>
+          <a:solidFill>
+            <a:srgbClr val="2E8FA3"/>
+          </a:solidFill>
+          <a:ln w="9525">
+            <a:solidFill>
+              <a:srgbClr val="2E8FA3"/>
+            </a:solidFill>
+          </a:ln>
+        </p:spPr>
+        <p:style>
+          <a:lnRef idx="1">
+            <a:schemeClr val="accent1"/>
+          </a:lnRef>
+          <a:fillRef idx="3">
+            <a:schemeClr val="accent1"/>
+          </a:fillRef>
+          <a:effectRef idx="2">
+            <a:schemeClr val="accent1"/>
+          </a:effectRef>
+          <a:fontRef idx="minor">
+            <a:schemeClr val="lt1"/>
+          </a:fontRef>
+        </p:style>
+        <p:txBody>
+          <a:bodyPr rtlCol="0" anchor="ctr"/>
+          <a:lstStyle/>
+          <a:p>
+            <a:pPr algn="ctr"/>
+          </a:p>
+        </p:txBody>
+      </p:sp>
+      <p:sp>
+        <p:nvSpPr>
           <p:cNvPr id="19" name="TextBox 18"/>
           <p:cNvSpPr txBox="1"/>
           <p:nvPr/>
         </p:nvSpPr>
         <p:spPr>
           <a:xfrm>
-            <a:off x="658368" y="6236208"/>
+            <a:off x="1207008" y="4425696"/>
+            <a:ext cx="9966960" cy="420624"/>
+          </a:xfrm>
+          <a:prstGeom prst="rect">
+            <a:avLst/>
+          </a:prstGeom>
+          <a:noFill/>
+        </p:spPr>
+        <p:txBody>
+          <a:bodyPr wrap="square" anchor="ctr" lIns="0" rIns="0" tIns="0" bIns="0">
+            <a:spAutoFit/>
+          </a:bodyPr>
+          <a:lstStyle/>
+          <a:p>
+            <a:pPr algn="l">
+              <a:lnSpc>
+                <a:spcPct val="98000"/>
+              </a:lnSpc>
+            </a:pPr>
+            <a:r>
+              <a:rPr sz="1040" b="1">
+                <a:solidFill>
+                  <a:srgbClr val="1A1A1A"/>
+                </a:solidFill>
+                <a:latin typeface="Hiragino Sans"/>
+                <a:ea typeface="Hiragino Sans"/>
+                <a:cs typeface="Hiragino Sans"/>
+              </a:rPr>
+              <a:t>ダンス部「カマダン」や弓道部など部活が活発。行事も生徒主体でにぎやか</a:t>
+            </a:r>
+          </a:p>
+        </p:txBody>
+      </p:sp>
+      <p:sp>
+        <p:nvSpPr>
+          <p:cNvPr id="20" name="Rounded Rectangle 19"/>
+          <p:cNvSpPr/>
+          <p:nvPr/>
+        </p:nvSpPr>
+        <p:spPr>
+          <a:xfrm>
+            <a:off x="658368" y="4937760"/>
+            <a:ext cx="10863072" cy="566928"/>
+          </a:xfrm>
+          <a:prstGeom prst="roundRect">
+            <a:avLst>
+              <a:gd name="adj" fmla="val 6000"/>
+            </a:avLst>
+          </a:prstGeom>
+          <a:solidFill>
+            <a:srgbClr val="FFFFFF"/>
+          </a:solidFill>
+          <a:ln w="9525">
+            <a:solidFill>
+              <a:srgbClr val="D7DDE8"/>
+            </a:solidFill>
+          </a:ln>
+        </p:spPr>
+        <p:style>
+          <a:lnRef idx="1">
+            <a:schemeClr val="accent1"/>
+          </a:lnRef>
+          <a:fillRef idx="3">
+            <a:schemeClr val="accent1"/>
+          </a:fillRef>
+          <a:effectRef idx="2">
+            <a:schemeClr val="accent1"/>
+          </a:effectRef>
+          <a:fontRef idx="minor">
+            <a:schemeClr val="lt1"/>
+          </a:fontRef>
+        </p:style>
+        <p:txBody>
+          <a:bodyPr rtlCol="0" anchor="ctr"/>
+          <a:lstStyle/>
+          <a:p>
+            <a:pPr algn="ctr"/>
+          </a:p>
+        </p:txBody>
+      </p:sp>
+      <p:sp>
+        <p:nvSpPr>
+          <p:cNvPr id="21" name="Oval 20"/>
+          <p:cNvSpPr/>
+          <p:nvPr/>
+        </p:nvSpPr>
+        <p:spPr>
+          <a:xfrm>
+            <a:off x="896112" y="5138928"/>
+            <a:ext cx="146304" cy="146304"/>
+          </a:xfrm>
+          <a:prstGeom prst="ellipse">
+            <a:avLst/>
+          </a:prstGeom>
+          <a:solidFill>
+            <a:srgbClr val="2E8FA3"/>
+          </a:solidFill>
+          <a:ln w="9525">
+            <a:solidFill>
+              <a:srgbClr val="2E8FA3"/>
+            </a:solidFill>
+          </a:ln>
+        </p:spPr>
+        <p:style>
+          <a:lnRef idx="1">
+            <a:schemeClr val="accent1"/>
+          </a:lnRef>
+          <a:fillRef idx="3">
+            <a:schemeClr val="accent1"/>
+          </a:fillRef>
+          <a:effectRef idx="2">
+            <a:schemeClr val="accent1"/>
+          </a:effectRef>
+          <a:fontRef idx="minor">
+            <a:schemeClr val="lt1"/>
+          </a:fontRef>
+        </p:style>
+        <p:txBody>
+          <a:bodyPr rtlCol="0" anchor="ctr"/>
+          <a:lstStyle/>
+          <a:p>
+            <a:pPr algn="ctr"/>
+          </a:p>
+        </p:txBody>
+      </p:sp>
+      <p:sp>
+        <p:nvSpPr>
+          <p:cNvPr id="22" name="TextBox 21"/>
+          <p:cNvSpPr txBox="1"/>
+          <p:nvPr/>
+        </p:nvSpPr>
+        <p:spPr>
+          <a:xfrm>
+            <a:off x="1207008" y="5010912"/>
+            <a:ext cx="9966960" cy="420624"/>
+          </a:xfrm>
+          <a:prstGeom prst="rect">
+            <a:avLst/>
+          </a:prstGeom>
+          <a:noFill/>
+        </p:spPr>
+        <p:txBody>
+          <a:bodyPr wrap="square" anchor="ctr" lIns="0" rIns="0" tIns="0" bIns="0">
+            <a:spAutoFit/>
+          </a:bodyPr>
+          <a:lstStyle/>
+          <a:p>
+            <a:pPr algn="l">
+              <a:lnSpc>
+                <a:spcPct val="98000"/>
+              </a:lnSpc>
+            </a:pPr>
+            <a:r>
+              <a:rPr sz="1040" b="1">
+                <a:solidFill>
+                  <a:srgbClr val="1A1A1A"/>
+                </a:solidFill>
+                <a:latin typeface="Hiragino Sans"/>
+                <a:ea typeface="Hiragino Sans"/>
+                <a:cs typeface="Hiragino Sans"/>
+              </a:rPr>
+              <a:t>校訓は「自主自律」。明るくのびのびした自由な校風</a:t>
+            </a:r>
+          </a:p>
+        </p:txBody>
+      </p:sp>
+      <p:sp>
+        <p:nvSpPr>
+          <p:cNvPr id="23" name="Rounded Rectangle 22"/>
+          <p:cNvSpPr/>
+          <p:nvPr/>
+        </p:nvSpPr>
+        <p:spPr>
+          <a:xfrm>
+            <a:off x="658368" y="5632704"/>
+            <a:ext cx="6217920" cy="420624"/>
+          </a:xfrm>
+          <a:prstGeom prst="roundRect">
+            <a:avLst>
+              <a:gd name="adj" fmla="val 6000"/>
+            </a:avLst>
+          </a:prstGeom>
+          <a:solidFill>
+            <a:srgbClr val="FFFFFF"/>
+          </a:solidFill>
+          <a:ln w="9525">
+            <a:solidFill>
+              <a:srgbClr val="D7DDE8"/>
+            </a:solidFill>
+          </a:ln>
+        </p:spPr>
+        <p:style>
+          <a:lnRef idx="1">
+            <a:schemeClr val="accent1"/>
+          </a:lnRef>
+          <a:fillRef idx="3">
+            <a:schemeClr val="accent1"/>
+          </a:fillRef>
+          <a:effectRef idx="2">
+            <a:schemeClr val="accent1"/>
+          </a:effectRef>
+          <a:fontRef idx="minor">
+            <a:schemeClr val="lt1"/>
+          </a:fontRef>
+        </p:style>
+        <p:txBody>
+          <a:bodyPr rtlCol="0" anchor="ctr"/>
+          <a:lstStyle/>
+          <a:p>
+            <a:pPr algn="ctr"/>
+          </a:p>
+        </p:txBody>
+      </p:sp>
+      <p:sp>
+        <p:nvSpPr>
+          <p:cNvPr id="24" name="TextBox 23"/>
+          <p:cNvSpPr txBox="1"/>
+          <p:nvPr/>
+        </p:nvSpPr>
+        <p:spPr>
+          <a:xfrm>
+            <a:off x="932688" y="5760720"/>
+            <a:ext cx="5669280" cy="182880"/>
+          </a:xfrm>
+          <a:prstGeom prst="rect">
+            <a:avLst/>
+          </a:prstGeom>
+          <a:noFill/>
+        </p:spPr>
+        <p:txBody>
+          <a:bodyPr wrap="square" anchor="ctr" lIns="0" rIns="0" tIns="0" bIns="0">
+            <a:spAutoFit/>
+          </a:bodyPr>
+          <a:lstStyle/>
+          <a:p>
+            <a:pPr algn="l">
+              <a:lnSpc>
+                <a:spcPct val="115000"/>
+              </a:lnSpc>
+            </a:pPr>
+            <a:r>
+              <a:rPr sz="1300" b="1">
+                <a:solidFill>
+                  <a:srgbClr val="1E6575"/>
+                </a:solidFill>
+                <a:latin typeface="Hiragino Sans"/>
+                <a:ea typeface="Hiragino Sans"/>
+                <a:cs typeface="Hiragino Sans"/>
+              </a:rPr>
+              <a:t>江ノ電「鎌倉高校前」駅から徒歩すぐ</a:t>
+            </a:r>
+          </a:p>
+        </p:txBody>
+      </p:sp>
+      <p:sp>
+        <p:nvSpPr>
+          <p:cNvPr id="25" name="TextBox 24"/>
+          <p:cNvSpPr txBox="1"/>
+          <p:nvPr/>
+        </p:nvSpPr>
+        <p:spPr>
+          <a:xfrm>
+            <a:off x="658368" y="6327648"/>
             <a:ext cx="9875520" cy="201168"/>
           </a:xfrm>
           <a:prstGeom prst="rect">
@@ -5921,7 +6875,7 @@
                 <a:ea typeface="Hiragino Sans"/>
                 <a:cs typeface="Hiragino Sans"/>
               </a:rPr>
-              <a:t>駅から近くて、行事が盛り上がる学校</a:t>
+              <a:t>和の施設がそろう、大船の大きな学校。</a:t>
             </a:r>
           </a:p>
         </p:txBody>
@@ -6114,14 +7068,467 @@
       </p:sp>
       <p:sp>
         <p:nvSpPr>
-          <p:cNvPr id="6" name="Oval 5"/>
+          <p:cNvPr id="6" name="Rounded Rectangle 5"/>
           <p:cNvSpPr/>
           <p:nvPr/>
         </p:nvSpPr>
         <p:spPr>
           <a:xfrm>
-            <a:off x="658368" y="1600200"/>
-            <a:ext cx="182880" cy="182880"/>
+            <a:off x="658368" y="1170432"/>
+            <a:ext cx="5303520" cy="1700784"/>
+          </a:xfrm>
+          <a:prstGeom prst="roundRect">
+            <a:avLst>
+              <a:gd name="adj" fmla="val 6000"/>
+            </a:avLst>
+          </a:prstGeom>
+          <a:solidFill>
+            <a:srgbClr val="FFFFFF"/>
+          </a:solidFill>
+          <a:ln w="9525">
+            <a:solidFill>
+              <a:srgbClr val="D7DDE8"/>
+            </a:solidFill>
+          </a:ln>
+        </p:spPr>
+        <p:style>
+          <a:lnRef idx="1">
+            <a:schemeClr val="accent1"/>
+          </a:lnRef>
+          <a:fillRef idx="3">
+            <a:schemeClr val="accent1"/>
+          </a:fillRef>
+          <a:effectRef idx="2">
+            <a:schemeClr val="accent1"/>
+          </a:effectRef>
+          <a:fontRef idx="minor">
+            <a:schemeClr val="lt1"/>
+          </a:fontRef>
+        </p:style>
+        <p:txBody>
+          <a:bodyPr rtlCol="0" anchor="ctr"/>
+          <a:lstStyle/>
+          <a:p>
+            <a:pPr algn="ctr"/>
+          </a:p>
+        </p:txBody>
+      </p:sp>
+      <p:pic>
+        <p:nvPicPr>
+          <p:cNvPr id="7" name="Picture 6" descr="wiki_sportsday_card.jpg"/>
+          <p:cNvPicPr>
+            <a:picLocks noChangeAspect="1"/>
+          </p:cNvPicPr>
+          <p:nvPr/>
+        </p:nvPicPr>
+        <p:blipFill>
+          <a:blip r:embed="rId2"/>
+          <a:srcRect t="3050" b="3050"/>
+          <a:stretch>
+            <a:fillRect/>
+          </a:stretch>
+        </p:blipFill>
+        <p:spPr>
+          <a:xfrm>
+            <a:off x="731520" y="1243584"/>
+            <a:ext cx="5157216" cy="1554480"/>
+          </a:xfrm>
+          <a:prstGeom prst="rect">
+            <a:avLst/>
+          </a:prstGeom>
+        </p:spPr>
+      </p:pic>
+      <p:sp>
+        <p:nvSpPr>
+          <p:cNvPr id="8" name="Rounded Rectangle 7"/>
+          <p:cNvSpPr/>
+          <p:nvPr/>
+        </p:nvSpPr>
+        <p:spPr>
+          <a:xfrm>
+            <a:off x="731520" y="1243584"/>
+            <a:ext cx="5157216" cy="1554480"/>
+          </a:xfrm>
+          <a:prstGeom prst="roundRect">
+            <a:avLst>
+              <a:gd name="adj" fmla="val 4000"/>
+            </a:avLst>
+          </a:prstGeom>
+          <a:noFill/>
+          <a:ln w="12700">
+            <a:solidFill>
+              <a:srgbClr val="FFFFFF"/>
+            </a:solidFill>
+          </a:ln>
+        </p:spPr>
+        <p:style>
+          <a:lnRef idx="1">
+            <a:schemeClr val="accent1"/>
+          </a:lnRef>
+          <a:fillRef idx="3">
+            <a:schemeClr val="accent1"/>
+          </a:fillRef>
+          <a:effectRef idx="2">
+            <a:schemeClr val="accent1"/>
+          </a:effectRef>
+          <a:fontRef idx="minor">
+            <a:schemeClr val="lt1"/>
+          </a:fontRef>
+        </p:style>
+        <p:txBody>
+          <a:bodyPr rtlCol="0" anchor="ctr"/>
+          <a:lstStyle/>
+          <a:p>
+            <a:pPr algn="ctr"/>
+          </a:p>
+        </p:txBody>
+      </p:sp>
+      <p:sp>
+        <p:nvSpPr>
+          <p:cNvPr id="9" name="Rounded Rectangle 8"/>
+          <p:cNvSpPr/>
+          <p:nvPr/>
+        </p:nvSpPr>
+        <p:spPr>
+          <a:xfrm>
+            <a:off x="731520" y="2468880"/>
+            <a:ext cx="5157216" cy="329184"/>
+          </a:xfrm>
+          <a:prstGeom prst="roundRect">
+            <a:avLst>
+              <a:gd name="adj" fmla="val 6000"/>
+            </a:avLst>
+          </a:prstGeom>
+          <a:solidFill>
+            <a:srgbClr val="0A162A"/>
+          </a:solidFill>
+          <a:ln>
+            <a:noFill/>
+          </a:ln>
+        </p:spPr>
+        <p:style>
+          <a:lnRef idx="1">
+            <a:schemeClr val="accent1"/>
+          </a:lnRef>
+          <a:fillRef idx="3">
+            <a:schemeClr val="accent1"/>
+          </a:fillRef>
+          <a:effectRef idx="2">
+            <a:schemeClr val="accent1"/>
+          </a:effectRef>
+          <a:fontRef idx="minor">
+            <a:schemeClr val="lt1"/>
+          </a:fontRef>
+        </p:style>
+        <p:txBody>
+          <a:bodyPr rtlCol="0" anchor="ctr"/>
+          <a:lstStyle/>
+          <a:p>
+            <a:pPr algn="ctr"/>
+          </a:p>
+        </p:txBody>
+      </p:sp>
+      <p:sp>
+        <p:nvSpPr>
+          <p:cNvPr id="10" name="TextBox 9"/>
+          <p:cNvSpPr txBox="1"/>
+          <p:nvPr/>
+        </p:nvSpPr>
+        <p:spPr>
+          <a:xfrm>
+            <a:off x="859536" y="2523744"/>
+            <a:ext cx="4901184" cy="219456"/>
+          </a:xfrm>
+          <a:prstGeom prst="rect">
+            <a:avLst/>
+          </a:prstGeom>
+          <a:noFill/>
+        </p:spPr>
+        <p:txBody>
+          <a:bodyPr wrap="square" anchor="ctr" lIns="0" rIns="0" tIns="0" bIns="0">
+            <a:spAutoFit/>
+          </a:bodyPr>
+          <a:lstStyle/>
+          <a:p>
+            <a:pPr algn="l">
+              <a:lnSpc>
+                <a:spcPct val="115000"/>
+              </a:lnSpc>
+            </a:pPr>
+            <a:r>
+              <a:rPr sz="900" b="1">
+                <a:solidFill>
+                  <a:srgbClr val="FFFFFF"/>
+                </a:solidFill>
+                <a:latin typeface="Hiragino Sans"/>
+                <a:ea typeface="Hiragino Sans"/>
+                <a:cs typeface="Hiragino Sans"/>
+              </a:rPr>
+              <a:t>体育祭（六国祭）</a:t>
+            </a:r>
+          </a:p>
+        </p:txBody>
+      </p:sp>
+      <p:sp>
+        <p:nvSpPr>
+          <p:cNvPr id="11" name="Rounded Rectangle 10"/>
+          <p:cNvSpPr/>
+          <p:nvPr/>
+        </p:nvSpPr>
+        <p:spPr>
+          <a:xfrm>
+            <a:off x="6217920" y="1170432"/>
+            <a:ext cx="5303520" cy="1700784"/>
+          </a:xfrm>
+          <a:prstGeom prst="roundRect">
+            <a:avLst>
+              <a:gd name="adj" fmla="val 6000"/>
+            </a:avLst>
+          </a:prstGeom>
+          <a:solidFill>
+            <a:srgbClr val="FFFFFF"/>
+          </a:solidFill>
+          <a:ln w="9525">
+            <a:solidFill>
+              <a:srgbClr val="D7DDE8"/>
+            </a:solidFill>
+          </a:ln>
+        </p:spPr>
+        <p:style>
+          <a:lnRef idx="1">
+            <a:schemeClr val="accent1"/>
+          </a:lnRef>
+          <a:fillRef idx="3">
+            <a:schemeClr val="accent1"/>
+          </a:fillRef>
+          <a:effectRef idx="2">
+            <a:schemeClr val="accent1"/>
+          </a:effectRef>
+          <a:fontRef idx="minor">
+            <a:schemeClr val="lt1"/>
+          </a:fontRef>
+        </p:style>
+        <p:txBody>
+          <a:bodyPr rtlCol="0" anchor="ctr"/>
+          <a:lstStyle/>
+          <a:p>
+            <a:pPr algn="ctr"/>
+          </a:p>
+        </p:txBody>
+      </p:sp>
+      <p:pic>
+        <p:nvPicPr>
+          <p:cNvPr id="12" name="Picture 11" descr="wiki_kannon_card.jpg"/>
+          <p:cNvPicPr>
+            <a:picLocks noChangeAspect="1"/>
+          </p:cNvPicPr>
+          <p:nvPr/>
+        </p:nvPicPr>
+        <p:blipFill>
+          <a:blip r:embed="rId3"/>
+          <a:srcRect t="3050" b="3050"/>
+          <a:stretch>
+            <a:fillRect/>
+          </a:stretch>
+        </p:blipFill>
+        <p:spPr>
+          <a:xfrm>
+            <a:off x="6291072" y="1243584"/>
+            <a:ext cx="5157216" cy="1554480"/>
+          </a:xfrm>
+          <a:prstGeom prst="rect">
+            <a:avLst/>
+          </a:prstGeom>
+        </p:spPr>
+      </p:pic>
+      <p:sp>
+        <p:nvSpPr>
+          <p:cNvPr id="13" name="Rounded Rectangle 12"/>
+          <p:cNvSpPr/>
+          <p:nvPr/>
+        </p:nvSpPr>
+        <p:spPr>
+          <a:xfrm>
+            <a:off x="6291072" y="1243584"/>
+            <a:ext cx="5157216" cy="1554480"/>
+          </a:xfrm>
+          <a:prstGeom prst="roundRect">
+            <a:avLst>
+              <a:gd name="adj" fmla="val 4000"/>
+            </a:avLst>
+          </a:prstGeom>
+          <a:noFill/>
+          <a:ln w="12700">
+            <a:solidFill>
+              <a:srgbClr val="FFFFFF"/>
+            </a:solidFill>
+          </a:ln>
+        </p:spPr>
+        <p:style>
+          <a:lnRef idx="1">
+            <a:schemeClr val="accent1"/>
+          </a:lnRef>
+          <a:fillRef idx="3">
+            <a:schemeClr val="accent1"/>
+          </a:fillRef>
+          <a:effectRef idx="2">
+            <a:schemeClr val="accent1"/>
+          </a:effectRef>
+          <a:fontRef idx="minor">
+            <a:schemeClr val="lt1"/>
+          </a:fontRef>
+        </p:style>
+        <p:txBody>
+          <a:bodyPr rtlCol="0" anchor="ctr"/>
+          <a:lstStyle/>
+          <a:p>
+            <a:pPr algn="ctr"/>
+          </a:p>
+        </p:txBody>
+      </p:sp>
+      <p:sp>
+        <p:nvSpPr>
+          <p:cNvPr id="14" name="Rounded Rectangle 13"/>
+          <p:cNvSpPr/>
+          <p:nvPr/>
+        </p:nvSpPr>
+        <p:spPr>
+          <a:xfrm>
+            <a:off x="6291072" y="2468880"/>
+            <a:ext cx="5157216" cy="329184"/>
+          </a:xfrm>
+          <a:prstGeom prst="roundRect">
+            <a:avLst>
+              <a:gd name="adj" fmla="val 6000"/>
+            </a:avLst>
+          </a:prstGeom>
+          <a:solidFill>
+            <a:srgbClr val="0A162A"/>
+          </a:solidFill>
+          <a:ln>
+            <a:noFill/>
+          </a:ln>
+        </p:spPr>
+        <p:style>
+          <a:lnRef idx="1">
+            <a:schemeClr val="accent1"/>
+          </a:lnRef>
+          <a:fillRef idx="3">
+            <a:schemeClr val="accent1"/>
+          </a:fillRef>
+          <a:effectRef idx="2">
+            <a:schemeClr val="accent1"/>
+          </a:effectRef>
+          <a:fontRef idx="minor">
+            <a:schemeClr val="lt1"/>
+          </a:fontRef>
+        </p:style>
+        <p:txBody>
+          <a:bodyPr rtlCol="0" anchor="ctr"/>
+          <a:lstStyle/>
+          <a:p>
+            <a:pPr algn="ctr"/>
+          </a:p>
+        </p:txBody>
+      </p:sp>
+      <p:sp>
+        <p:nvSpPr>
+          <p:cNvPr id="15" name="TextBox 14"/>
+          <p:cNvSpPr txBox="1"/>
+          <p:nvPr/>
+        </p:nvSpPr>
+        <p:spPr>
+          <a:xfrm>
+            <a:off x="6419088" y="2523744"/>
+            <a:ext cx="4901184" cy="219456"/>
+          </a:xfrm>
+          <a:prstGeom prst="rect">
+            <a:avLst/>
+          </a:prstGeom>
+          <a:noFill/>
+        </p:spPr>
+        <p:txBody>
+          <a:bodyPr wrap="square" anchor="ctr" lIns="0" rIns="0" tIns="0" bIns="0">
+            <a:spAutoFit/>
+          </a:bodyPr>
+          <a:lstStyle/>
+          <a:p>
+            <a:pPr algn="l">
+              <a:lnSpc>
+                <a:spcPct val="115000"/>
+              </a:lnSpc>
+            </a:pPr>
+            <a:r>
+              <a:rPr sz="900" b="1">
+                <a:solidFill>
+                  <a:srgbClr val="FFFFFF"/>
+                </a:solidFill>
+                <a:latin typeface="Hiragino Sans"/>
+                <a:ea typeface="Hiragino Sans"/>
+                <a:cs typeface="Hiragino Sans"/>
+              </a:rPr>
+              <a:t>大船のシンボル・大船観音</a:t>
+            </a:r>
+          </a:p>
+        </p:txBody>
+      </p:sp>
+      <p:sp>
+        <p:nvSpPr>
+          <p:cNvPr id="16" name="Rounded Rectangle 15"/>
+          <p:cNvSpPr/>
+          <p:nvPr/>
+        </p:nvSpPr>
+        <p:spPr>
+          <a:xfrm>
+            <a:off x="658368" y="3072384"/>
+            <a:ext cx="10863072" cy="566928"/>
+          </a:xfrm>
+          <a:prstGeom prst="roundRect">
+            <a:avLst>
+              <a:gd name="adj" fmla="val 6000"/>
+            </a:avLst>
+          </a:prstGeom>
+          <a:solidFill>
+            <a:srgbClr val="FFFFFF"/>
+          </a:solidFill>
+          <a:ln w="9525">
+            <a:solidFill>
+              <a:srgbClr val="D7DDE8"/>
+            </a:solidFill>
+          </a:ln>
+        </p:spPr>
+        <p:style>
+          <a:lnRef idx="1">
+            <a:schemeClr val="accent1"/>
+          </a:lnRef>
+          <a:fillRef idx="3">
+            <a:schemeClr val="accent1"/>
+          </a:fillRef>
+          <a:effectRef idx="2">
+            <a:schemeClr val="accent1"/>
+          </a:effectRef>
+          <a:fontRef idx="minor">
+            <a:schemeClr val="lt1"/>
+          </a:fontRef>
+        </p:style>
+        <p:txBody>
+          <a:bodyPr rtlCol="0" anchor="ctr"/>
+          <a:lstStyle/>
+          <a:p>
+            <a:pPr algn="ctr"/>
+          </a:p>
+        </p:txBody>
+      </p:sp>
+      <p:sp>
+        <p:nvSpPr>
+          <p:cNvPr id="17" name="Oval 16"/>
+          <p:cNvSpPr/>
+          <p:nvPr/>
+        </p:nvSpPr>
+        <p:spPr>
+          <a:xfrm>
+            <a:off x="896112" y="3273552"/>
+            <a:ext cx="146304" cy="146304"/>
           </a:xfrm>
           <a:prstGeom prst="ellipse">
             <a:avLst/>
@@ -6159,14 +7566,14 @@
       </p:sp>
       <p:sp>
         <p:nvSpPr>
-          <p:cNvPr id="7" name="TextBox 6"/>
+          <p:cNvPr id="18" name="TextBox 17"/>
           <p:cNvSpPr txBox="1"/>
           <p:nvPr/>
         </p:nvSpPr>
         <p:spPr>
           <a:xfrm>
-            <a:off x="1170432" y="1481328"/>
-            <a:ext cx="5806440" cy="621792"/>
+            <a:off x="1207008" y="3145536"/>
+            <a:ext cx="9966960" cy="420624"/>
           </a:xfrm>
           <a:prstGeom prst="rect">
             <a:avLst/>
@@ -6174,18 +7581,18 @@
           <a:noFill/>
         </p:spPr>
         <p:txBody>
-          <a:bodyPr wrap="square" anchor="t" lIns="0" rIns="0" tIns="0" bIns="0">
+          <a:bodyPr wrap="square" anchor="ctr" lIns="0" rIns="0" tIns="0" bIns="0">
             <a:spAutoFit/>
           </a:bodyPr>
           <a:lstStyle/>
           <a:p>
             <a:pPr algn="l">
               <a:lnSpc>
-                <a:spcPct val="115000"/>
+                <a:spcPct val="98000"/>
               </a:lnSpc>
             </a:pPr>
             <a:r>
-              <a:rPr sz="1700" b="1">
+              <a:rPr sz="1040" b="1">
                 <a:solidFill>
                   <a:srgbClr val="1A1A1A"/>
                 </a:solidFill>
@@ -6193,21 +7600,68 @@
                 <a:ea typeface="Hiragino Sans"/>
                 <a:cs typeface="Hiragino Sans"/>
               </a:rPr>
-              <a:t>大船駅から徒歩。藤沢・鎌倉どちらからも通いやすい近さ</a:t>
-            </a:r>
-          </a:p>
-        </p:txBody>
-      </p:sp>
-      <p:sp>
-        <p:nvSpPr>
-          <p:cNvPr id="8" name="Oval 7"/>
+              <a:t>能舞台付きの視聴覚室・純和風庭園・弓道場など、ちょっと珍しい和の施設がそろう</a:t>
+            </a:r>
+          </a:p>
+        </p:txBody>
+      </p:sp>
+      <p:sp>
+        <p:nvSpPr>
+          <p:cNvPr id="19" name="Rounded Rectangle 18"/>
           <p:cNvSpPr/>
           <p:nvPr/>
         </p:nvSpPr>
         <p:spPr>
           <a:xfrm>
-            <a:off x="658368" y="2542032"/>
-            <a:ext cx="182880" cy="182880"/>
+            <a:off x="658368" y="3657600"/>
+            <a:ext cx="10863072" cy="566928"/>
+          </a:xfrm>
+          <a:prstGeom prst="roundRect">
+            <a:avLst>
+              <a:gd name="adj" fmla="val 6000"/>
+            </a:avLst>
+          </a:prstGeom>
+          <a:solidFill>
+            <a:srgbClr val="FFFFFF"/>
+          </a:solidFill>
+          <a:ln w="9525">
+            <a:solidFill>
+              <a:srgbClr val="D7DDE8"/>
+            </a:solidFill>
+          </a:ln>
+        </p:spPr>
+        <p:style>
+          <a:lnRef idx="1">
+            <a:schemeClr val="accent1"/>
+          </a:lnRef>
+          <a:fillRef idx="3">
+            <a:schemeClr val="accent1"/>
+          </a:fillRef>
+          <a:effectRef idx="2">
+            <a:schemeClr val="accent1"/>
+          </a:effectRef>
+          <a:fontRef idx="minor">
+            <a:schemeClr val="lt1"/>
+          </a:fontRef>
+        </p:style>
+        <p:txBody>
+          <a:bodyPr rtlCol="0" anchor="ctr"/>
+          <a:lstStyle/>
+          <a:p>
+            <a:pPr algn="ctr"/>
+          </a:p>
+        </p:txBody>
+      </p:sp>
+      <p:sp>
+        <p:nvSpPr>
+          <p:cNvPr id="20" name="Oval 19"/>
+          <p:cNvSpPr/>
+          <p:nvPr/>
+        </p:nvSpPr>
+        <p:spPr>
+          <a:xfrm>
+            <a:off x="896112" y="3858768"/>
+            <a:ext cx="146304" cy="146304"/>
           </a:xfrm>
           <a:prstGeom prst="ellipse">
             <a:avLst/>
@@ -6245,14 +7699,14 @@
       </p:sp>
       <p:sp>
         <p:nvSpPr>
-          <p:cNvPr id="9" name="TextBox 8"/>
+          <p:cNvPr id="21" name="TextBox 20"/>
           <p:cNvSpPr txBox="1"/>
           <p:nvPr/>
         </p:nvSpPr>
         <p:spPr>
           <a:xfrm>
-            <a:off x="1170432" y="2423160"/>
-            <a:ext cx="5806440" cy="621792"/>
+            <a:off x="1207008" y="3730752"/>
+            <a:ext cx="9966960" cy="420624"/>
           </a:xfrm>
           <a:prstGeom prst="rect">
             <a:avLst/>
@@ -6260,18 +7714,18 @@
           <a:noFill/>
         </p:spPr>
         <p:txBody>
-          <a:bodyPr wrap="square" anchor="t" lIns="0" rIns="0" tIns="0" bIns="0">
+          <a:bodyPr wrap="square" anchor="ctr" lIns="0" rIns="0" tIns="0" bIns="0">
             <a:spAutoFit/>
           </a:bodyPr>
           <a:lstStyle/>
           <a:p>
             <a:pPr algn="l">
               <a:lnSpc>
-                <a:spcPct val="115000"/>
+                <a:spcPct val="98000"/>
               </a:lnSpc>
             </a:pPr>
             <a:r>
-              <a:rPr sz="1700" b="1">
+              <a:rPr sz="1040" b="1">
                 <a:solidFill>
                   <a:srgbClr val="1A1A1A"/>
                 </a:solidFill>
@@ -6279,21 +7733,68 @@
                 <a:ea typeface="Hiragino Sans"/>
                 <a:cs typeface="Hiragino Sans"/>
               </a:rPr>
-              <a:t>自習室・図書館など施設が充実、落ち着いて過ごせる</a:t>
-            </a:r>
-          </a:p>
-        </p:txBody>
-      </p:sp>
-      <p:sp>
-        <p:nvSpPr>
-          <p:cNvPr id="10" name="Oval 9"/>
+              <a:t>文化祭「白帆祭」・体育祭「六国祭」は大規模校ならではの活気。応援団やチアも盛り上がる</a:t>
+            </a:r>
+          </a:p>
+        </p:txBody>
+      </p:sp>
+      <p:sp>
+        <p:nvSpPr>
+          <p:cNvPr id="22" name="Rounded Rectangle 21"/>
           <p:cNvSpPr/>
           <p:nvPr/>
         </p:nvSpPr>
         <p:spPr>
           <a:xfrm>
-            <a:off x="658368" y="3483864"/>
-            <a:ext cx="182880" cy="182880"/>
+            <a:off x="658368" y="4242816"/>
+            <a:ext cx="10863072" cy="566928"/>
+          </a:xfrm>
+          <a:prstGeom prst="roundRect">
+            <a:avLst>
+              <a:gd name="adj" fmla="val 6000"/>
+            </a:avLst>
+          </a:prstGeom>
+          <a:solidFill>
+            <a:srgbClr val="FFFFFF"/>
+          </a:solidFill>
+          <a:ln w="9525">
+            <a:solidFill>
+              <a:srgbClr val="D7DDE8"/>
+            </a:solidFill>
+          </a:ln>
+        </p:spPr>
+        <p:style>
+          <a:lnRef idx="1">
+            <a:schemeClr val="accent1"/>
+          </a:lnRef>
+          <a:fillRef idx="3">
+            <a:schemeClr val="accent1"/>
+          </a:fillRef>
+          <a:effectRef idx="2">
+            <a:schemeClr val="accent1"/>
+          </a:effectRef>
+          <a:fontRef idx="minor">
+            <a:schemeClr val="lt1"/>
+          </a:fontRef>
+        </p:style>
+        <p:txBody>
+          <a:bodyPr rtlCol="0" anchor="ctr"/>
+          <a:lstStyle/>
+          <a:p>
+            <a:pPr algn="ctr"/>
+          </a:p>
+        </p:txBody>
+      </p:sp>
+      <p:sp>
+        <p:nvSpPr>
+          <p:cNvPr id="23" name="Oval 22"/>
+          <p:cNvSpPr/>
+          <p:nvPr/>
+        </p:nvSpPr>
+        <p:spPr>
+          <a:xfrm>
+            <a:off x="896112" y="4443984"/>
+            <a:ext cx="146304" cy="146304"/>
           </a:xfrm>
           <a:prstGeom prst="ellipse">
             <a:avLst/>
@@ -6331,14 +7832,14 @@
       </p:sp>
       <p:sp>
         <p:nvSpPr>
-          <p:cNvPr id="11" name="TextBox 10"/>
+          <p:cNvPr id="24" name="TextBox 23"/>
           <p:cNvSpPr txBox="1"/>
           <p:nvPr/>
         </p:nvSpPr>
         <p:spPr>
           <a:xfrm>
-            <a:off x="1170432" y="3364992"/>
-            <a:ext cx="5806440" cy="621792"/>
+            <a:off x="1207008" y="4315968"/>
+            <a:ext cx="9966960" cy="420624"/>
           </a:xfrm>
           <a:prstGeom prst="rect">
             <a:avLst/>
@@ -6346,18 +7847,18 @@
           <a:noFill/>
         </p:spPr>
         <p:txBody>
-          <a:bodyPr wrap="square" anchor="t" lIns="0" rIns="0" tIns="0" bIns="0">
+          <a:bodyPr wrap="square" anchor="ctr" lIns="0" rIns="0" tIns="0" bIns="0">
             <a:spAutoFit/>
           </a:bodyPr>
           <a:lstStyle/>
           <a:p>
             <a:pPr algn="l">
               <a:lnSpc>
-                <a:spcPct val="115000"/>
+                <a:spcPct val="98000"/>
               </a:lnSpc>
             </a:pPr>
             <a:r>
-              <a:rPr sz="1700" b="1">
+              <a:rPr sz="1040" b="1">
                 <a:solidFill>
                   <a:srgbClr val="1A1A1A"/>
                 </a:solidFill>
@@ -6365,21 +7866,21 @@
                 <a:ea typeface="Hiragino Sans"/>
                 <a:cs typeface="Hiragino Sans"/>
               </a:rPr>
-              <a:t>文化祭「白帆祭」・体育祭「六国祭」は応援団やチアまで本気</a:t>
-            </a:r>
-          </a:p>
-        </p:txBody>
-      </p:sp>
-      <p:sp>
-        <p:nvSpPr>
-          <p:cNvPr id="12" name="Rounded Rectangle 11"/>
+              <a:t>部活・同好会が三十近く、加入率も高い（演劇部は全国大会の常連）</a:t>
+            </a:r>
+          </a:p>
+        </p:txBody>
+      </p:sp>
+      <p:sp>
+        <p:nvSpPr>
+          <p:cNvPr id="25" name="Rounded Rectangle 24"/>
           <p:cNvSpPr/>
           <p:nvPr/>
         </p:nvSpPr>
         <p:spPr>
           <a:xfrm>
-            <a:off x="658368" y="4709160"/>
-            <a:ext cx="6217920" cy="566928"/>
+            <a:off x="658368" y="4828032"/>
+            <a:ext cx="10863072" cy="566928"/>
           </a:xfrm>
           <a:prstGeom prst="roundRect">
             <a:avLst>
@@ -6419,14 +7920,147 @@
       </p:sp>
       <p:sp>
         <p:nvSpPr>
-          <p:cNvPr id="13" name="TextBox 12"/>
+          <p:cNvPr id="26" name="Oval 25"/>
+          <p:cNvSpPr/>
+          <p:nvPr/>
+        </p:nvSpPr>
+        <p:spPr>
+          <a:xfrm>
+            <a:off x="896112" y="5029200"/>
+            <a:ext cx="146304" cy="146304"/>
+          </a:xfrm>
+          <a:prstGeom prst="ellipse">
+            <a:avLst/>
+          </a:prstGeom>
+          <a:solidFill>
+            <a:srgbClr val="2E8FA3"/>
+          </a:solidFill>
+          <a:ln w="9525">
+            <a:solidFill>
+              <a:srgbClr val="2E8FA3"/>
+            </a:solidFill>
+          </a:ln>
+        </p:spPr>
+        <p:style>
+          <a:lnRef idx="1">
+            <a:schemeClr val="accent1"/>
+          </a:lnRef>
+          <a:fillRef idx="3">
+            <a:schemeClr val="accent1"/>
+          </a:fillRef>
+          <a:effectRef idx="2">
+            <a:schemeClr val="accent1"/>
+          </a:effectRef>
+          <a:fontRef idx="minor">
+            <a:schemeClr val="lt1"/>
+          </a:fontRef>
+        </p:style>
+        <p:txBody>
+          <a:bodyPr rtlCol="0" anchor="ctr"/>
+          <a:lstStyle/>
+          <a:p>
+            <a:pPr algn="ctr"/>
+          </a:p>
+        </p:txBody>
+      </p:sp>
+      <p:sp>
+        <p:nvSpPr>
+          <p:cNvPr id="27" name="TextBox 26"/>
           <p:cNvSpPr txBox="1"/>
           <p:nvPr/>
         </p:nvSpPr>
         <p:spPr>
           <a:xfrm>
-            <a:off x="932688" y="4882896"/>
-            <a:ext cx="5669280" cy="219456"/>
+            <a:off x="1207008" y="4901184"/>
+            <a:ext cx="9966960" cy="420624"/>
+          </a:xfrm>
+          <a:prstGeom prst="rect">
+            <a:avLst/>
+          </a:prstGeom>
+          <a:noFill/>
+        </p:spPr>
+        <p:txBody>
+          <a:bodyPr wrap="square" anchor="ctr" lIns="0" rIns="0" tIns="0" bIns="0">
+            <a:spAutoFit/>
+          </a:bodyPr>
+          <a:lstStyle/>
+          <a:p>
+            <a:pPr algn="l">
+              <a:lnSpc>
+                <a:spcPct val="98000"/>
+              </a:lnSpc>
+            </a:pPr>
+            <a:r>
+              <a:rPr sz="1040" b="1">
+                <a:solidFill>
+                  <a:srgbClr val="1A1A1A"/>
+                </a:solidFill>
+                <a:latin typeface="Hiragino Sans"/>
+                <a:ea typeface="Hiragino Sans"/>
+                <a:cs typeface="Hiragino Sans"/>
+              </a:rPr>
+              <a:t>大船駅から徒歩。藤沢・鎌倉どちらからも通いやすい</a:t>
+            </a:r>
+          </a:p>
+        </p:txBody>
+      </p:sp>
+      <p:sp>
+        <p:nvSpPr>
+          <p:cNvPr id="28" name="Rounded Rectangle 27"/>
+          <p:cNvSpPr/>
+          <p:nvPr/>
+        </p:nvSpPr>
+        <p:spPr>
+          <a:xfrm>
+            <a:off x="658368" y="5632704"/>
+            <a:ext cx="6217920" cy="420624"/>
+          </a:xfrm>
+          <a:prstGeom prst="roundRect">
+            <a:avLst>
+              <a:gd name="adj" fmla="val 6000"/>
+            </a:avLst>
+          </a:prstGeom>
+          <a:solidFill>
+            <a:srgbClr val="FFFFFF"/>
+          </a:solidFill>
+          <a:ln w="9525">
+            <a:solidFill>
+              <a:srgbClr val="D7DDE8"/>
+            </a:solidFill>
+          </a:ln>
+        </p:spPr>
+        <p:style>
+          <a:lnRef idx="1">
+            <a:schemeClr val="accent1"/>
+          </a:lnRef>
+          <a:fillRef idx="3">
+            <a:schemeClr val="accent1"/>
+          </a:fillRef>
+          <a:effectRef idx="2">
+            <a:schemeClr val="accent1"/>
+          </a:effectRef>
+          <a:fontRef idx="minor">
+            <a:schemeClr val="lt1"/>
+          </a:fontRef>
+        </p:style>
+        <p:txBody>
+          <a:bodyPr rtlCol="0" anchor="ctr"/>
+          <a:lstStyle/>
+          <a:p>
+            <a:pPr algn="ctr"/>
+          </a:p>
+        </p:txBody>
+      </p:sp>
+      <p:sp>
+        <p:nvSpPr>
+          <p:cNvPr id="29" name="TextBox 28"/>
+          <p:cNvSpPr txBox="1"/>
+          <p:nvPr/>
+        </p:nvSpPr>
+        <p:spPr>
+          <a:xfrm>
+            <a:off x="932688" y="5760720"/>
+            <a:ext cx="5669280" cy="182880"/>
           </a:xfrm>
           <a:prstGeom prst="rect">
             <a:avLst/>
@@ -6445,7 +8079,7 @@
               </a:lnSpc>
             </a:pPr>
             <a:r>
-              <a:rPr sz="1500" b="1">
+              <a:rPr sz="1300" b="1">
                 <a:solidFill>
                   <a:srgbClr val="1E6575"/>
                 </a:solidFill>
@@ -6460,216 +8094,13 @@
       </p:sp>
       <p:sp>
         <p:nvSpPr>
-          <p:cNvPr id="14" name="Rounded Rectangle 13"/>
-          <p:cNvSpPr/>
-          <p:nvPr/>
-        </p:nvSpPr>
-        <p:spPr>
-          <a:xfrm>
-            <a:off x="7360920" y="1335024"/>
-            <a:ext cx="4224528" cy="2578608"/>
-          </a:xfrm>
-          <a:prstGeom prst="roundRect">
-            <a:avLst>
-              <a:gd name="adj" fmla="val 6000"/>
-            </a:avLst>
-          </a:prstGeom>
-          <a:solidFill>
-            <a:srgbClr val="FFFFFF"/>
-          </a:solidFill>
-          <a:ln w="9525">
-            <a:solidFill>
-              <a:srgbClr val="D7DDE8"/>
-            </a:solidFill>
-          </a:ln>
-        </p:spPr>
-        <p:style>
-          <a:lnRef idx="1">
-            <a:schemeClr val="accent1"/>
-          </a:lnRef>
-          <a:fillRef idx="3">
-            <a:schemeClr val="accent1"/>
-          </a:fillRef>
-          <a:effectRef idx="2">
-            <a:schemeClr val="accent1"/>
-          </a:effectRef>
-          <a:fontRef idx="minor">
-            <a:schemeClr val="lt1"/>
-          </a:fontRef>
-        </p:style>
-        <p:txBody>
-          <a:bodyPr rtlCol="0" anchor="ctr"/>
-          <a:lstStyle/>
-          <a:p>
-            <a:pPr algn="ctr"/>
-          </a:p>
-        </p:txBody>
-      </p:sp>
-      <p:pic>
-        <p:nvPicPr>
-          <p:cNvPr id="15" name="Picture 14" descr="wiki_campus_hero.jpg"/>
-          <p:cNvPicPr>
-            <a:picLocks noChangeAspect="1"/>
-          </p:cNvPicPr>
-          <p:nvPr/>
-        </p:nvPicPr>
-        <p:blipFill>
-          <a:blip r:embed="rId2"/>
-          <a:srcRect t="10239" b="10239"/>
-          <a:stretch>
-            <a:fillRect/>
-          </a:stretch>
-        </p:blipFill>
-        <p:spPr>
-          <a:xfrm>
-            <a:off x="7434072" y="1408176"/>
-            <a:ext cx="4078224" cy="2432304"/>
-          </a:xfrm>
-          <a:prstGeom prst="rect">
-            <a:avLst/>
-          </a:prstGeom>
-        </p:spPr>
-      </p:pic>
-      <p:sp>
-        <p:nvSpPr>
-          <p:cNvPr id="16" name="Rounded Rectangle 15"/>
-          <p:cNvSpPr/>
-          <p:nvPr/>
-        </p:nvSpPr>
-        <p:spPr>
-          <a:xfrm>
-            <a:off x="7434072" y="1408176"/>
-            <a:ext cx="4078224" cy="2432304"/>
-          </a:xfrm>
-          <a:prstGeom prst="roundRect">
-            <a:avLst>
-              <a:gd name="adj" fmla="val 4000"/>
-            </a:avLst>
-          </a:prstGeom>
-          <a:noFill/>
-          <a:ln w="12700">
-            <a:solidFill>
-              <a:srgbClr val="FFFFFF"/>
-            </a:solidFill>
-          </a:ln>
-        </p:spPr>
-        <p:style>
-          <a:lnRef idx="1">
-            <a:schemeClr val="accent1"/>
-          </a:lnRef>
-          <a:fillRef idx="3">
-            <a:schemeClr val="accent1"/>
-          </a:fillRef>
-          <a:effectRef idx="2">
-            <a:schemeClr val="accent1"/>
-          </a:effectRef>
-          <a:fontRef idx="minor">
-            <a:schemeClr val="lt1"/>
-          </a:fontRef>
-        </p:style>
-        <p:txBody>
-          <a:bodyPr rtlCol="0" anchor="ctr"/>
-          <a:lstStyle/>
-          <a:p>
-            <a:pPr algn="ctr"/>
-          </a:p>
-        </p:txBody>
-      </p:sp>
-      <p:sp>
-        <p:nvSpPr>
-          <p:cNvPr id="17" name="Rounded Rectangle 16"/>
-          <p:cNvSpPr/>
-          <p:nvPr/>
-        </p:nvSpPr>
-        <p:spPr>
-          <a:xfrm>
-            <a:off x="7434072" y="3511296"/>
-            <a:ext cx="4078224" cy="329184"/>
-          </a:xfrm>
-          <a:prstGeom prst="roundRect">
-            <a:avLst>
-              <a:gd name="adj" fmla="val 6000"/>
-            </a:avLst>
-          </a:prstGeom>
-          <a:solidFill>
-            <a:srgbClr val="0A162A"/>
-          </a:solidFill>
-          <a:ln>
-            <a:noFill/>
-          </a:ln>
-        </p:spPr>
-        <p:style>
-          <a:lnRef idx="1">
-            <a:schemeClr val="accent1"/>
-          </a:lnRef>
-          <a:fillRef idx="3">
-            <a:schemeClr val="accent1"/>
-          </a:fillRef>
-          <a:effectRef idx="2">
-            <a:schemeClr val="accent1"/>
-          </a:effectRef>
-          <a:fontRef idx="minor">
-            <a:schemeClr val="lt1"/>
-          </a:fontRef>
-        </p:style>
-        <p:txBody>
-          <a:bodyPr rtlCol="0" anchor="ctr"/>
-          <a:lstStyle/>
-          <a:p>
-            <a:pPr algn="ctr"/>
-          </a:p>
-        </p:txBody>
-      </p:sp>
-      <p:sp>
-        <p:nvSpPr>
-          <p:cNvPr id="18" name="TextBox 17"/>
+          <p:cNvPr id="30" name="TextBox 29"/>
           <p:cNvSpPr txBox="1"/>
           <p:nvPr/>
         </p:nvSpPr>
         <p:spPr>
           <a:xfrm>
-            <a:off x="7562088" y="3566160"/>
-            <a:ext cx="3822192" cy="219456"/>
-          </a:xfrm>
-          <a:prstGeom prst="rect">
-            <a:avLst/>
-          </a:prstGeom>
-          <a:noFill/>
-        </p:spPr>
-        <p:txBody>
-          <a:bodyPr wrap="square" anchor="ctr" lIns="0" rIns="0" tIns="0" bIns="0">
-            <a:spAutoFit/>
-          </a:bodyPr>
-          <a:lstStyle/>
-          <a:p>
-            <a:pPr algn="l">
-              <a:lnSpc>
-                <a:spcPct val="115000"/>
-              </a:lnSpc>
-            </a:pPr>
-            <a:r>
-              <a:rPr sz="900" b="1">
-                <a:solidFill>
-                  <a:srgbClr val="FFFFFF"/>
-                </a:solidFill>
-                <a:latin typeface="Hiragino Sans"/>
-                <a:ea typeface="Hiragino Sans"/>
-                <a:cs typeface="Hiragino Sans"/>
-              </a:rPr>
-              <a:t>校舎</a:t>
-            </a:r>
-          </a:p>
-        </p:txBody>
-      </p:sp>
-      <p:sp>
-        <p:nvSpPr>
-          <p:cNvPr id="19" name="TextBox 18"/>
-          <p:cNvSpPr txBox="1"/>
-          <p:nvPr/>
-        </p:nvSpPr>
-        <p:spPr>
-          <a:xfrm>
-            <a:off x="658368" y="6236208"/>
+            <a:off x="658368" y="6327648"/>
             <a:ext cx="9875520" cy="201168"/>
           </a:xfrm>
           <a:prstGeom prst="rect">
@@ -6720,12 +8151,21 @@
         <p:nvPr/>
       </p:nvGrpSpPr>
       <p:grpSpPr/>
-      <p:sp>
-        <p:nvSpPr>
-          <p:cNvPr id="2" name="Rectangle 1"/>
-          <p:cNvSpPr/>
-          <p:nvPr/>
-        </p:nvSpPr>
+      <p:pic>
+        <p:nvPicPr>
+          <p:cNvPr id="2" name="Picture 1" descr="wiki_campus_hero.jpg"/>
+          <p:cNvPicPr>
+            <a:picLocks noChangeAspect="1"/>
+          </p:cNvPicPr>
+          <p:nvPr/>
+        </p:nvPicPr>
+        <p:blipFill>
+          <a:blip r:embed="rId2"/>
+          <a:srcRect t="12163" b="12163"/>
+          <a:stretch>
+            <a:fillRect/>
+          </a:stretch>
+        </p:blipFill>
         <p:spPr>
           <a:xfrm>
             <a:off x="0" y="0"/>
@@ -6734,8 +8174,24 @@
           <a:prstGeom prst="rect">
             <a:avLst/>
           </a:prstGeom>
-          <a:solidFill>
-            <a:srgbClr val="EAF7FB"/>
+        </p:spPr>
+      </p:pic>
+      <p:sp>
+        <p:nvSpPr>
+          <p:cNvPr id="3" name="Rectangle 2"/>
+          <p:cNvSpPr/>
+          <p:nvPr/>
+        </p:nvSpPr>
+        <p:spPr>
+          <a:xfrm>
+            <a:off x="0" y="4892040"/>
+            <a:ext cx="12191695" cy="1965960"/>
+          </a:xfrm>
+          <a:prstGeom prst="rect">
+            <a:avLst/>
+          </a:prstGeom>
+          <a:solidFill>
+            <a:srgbClr val="0A162A"/>
           </a:solidFill>
           <a:ln>
             <a:noFill/>
@@ -6763,52 +8219,25 @@
           </a:p>
         </p:txBody>
       </p:sp>
-      <p:pic>
-        <p:nvPicPr>
-          <p:cNvPr id="3" name="Picture 2" descr="wiki_campus_hero.jpg"/>
-          <p:cNvPicPr>
-            <a:picLocks noChangeAspect="1"/>
-          </p:cNvPicPr>
-          <p:nvPr/>
-        </p:nvPicPr>
-        <p:blipFill>
-          <a:blip r:embed="rId2"/>
-          <a:srcRect t="24173" b="24173"/>
-          <a:stretch>
-            <a:fillRect/>
-          </a:stretch>
-        </p:blipFill>
-        <p:spPr>
-          <a:xfrm>
-            <a:off x="676656" y="411480"/>
-            <a:ext cx="10835640" cy="4160520"/>
+      <p:sp>
+        <p:nvSpPr>
+          <p:cNvPr id="4" name="Rectangle 3"/>
+          <p:cNvSpPr/>
+          <p:nvPr/>
+        </p:nvSpPr>
+        <p:spPr>
+          <a:xfrm>
+            <a:off x="0" y="5056632"/>
+            <a:ext cx="12191695" cy="1801368"/>
           </a:xfrm>
           <a:prstGeom prst="rect">
             <a:avLst/>
           </a:prstGeom>
-        </p:spPr>
-      </p:pic>
-      <p:sp>
-        <p:nvSpPr>
-          <p:cNvPr id="4" name="Rounded Rectangle 3"/>
-          <p:cNvSpPr/>
-          <p:nvPr/>
-        </p:nvSpPr>
-        <p:spPr>
-          <a:xfrm>
-            <a:off x="676656" y="411480"/>
-            <a:ext cx="10835640" cy="4160520"/>
-          </a:xfrm>
-          <a:prstGeom prst="roundRect">
-            <a:avLst>
-              <a:gd name="adj" fmla="val 4000"/>
-            </a:avLst>
-          </a:prstGeom>
-          <a:noFill/>
-          <a:ln w="12700">
-            <a:solidFill>
-              <a:srgbClr val="FFFFFF"/>
-            </a:solidFill>
+          <a:solidFill>
+            <a:srgbClr val="0A162A"/>
+          </a:solidFill>
+          <a:ln>
+            <a:noFill/>
           </a:ln>
         </p:spPr>
         <p:style>
@@ -6841,14 +8270,14 @@
         </p:nvSpPr>
         <p:spPr>
           <a:xfrm>
-            <a:off x="0" y="4443984"/>
-            <a:ext cx="12191695" cy="2414016"/>
+            <a:off x="0" y="5221224"/>
+            <a:ext cx="12191695" cy="1636776"/>
           </a:xfrm>
           <a:prstGeom prst="rect">
             <a:avLst/>
           </a:prstGeom>
           <a:solidFill>
-            <a:srgbClr val="0F2A4F"/>
+            <a:srgbClr val="0A162A"/>
           </a:solidFill>
           <a:ln>
             <a:noFill/>
@@ -6884,14 +8313,14 @@
         </p:nvSpPr>
         <p:spPr>
           <a:xfrm>
-            <a:off x="0" y="4443984"/>
-            <a:ext cx="12191695" cy="73152"/>
+            <a:off x="0" y="5385816"/>
+            <a:ext cx="12191695" cy="1472184"/>
           </a:xfrm>
           <a:prstGeom prst="rect">
             <a:avLst/>
           </a:prstGeom>
           <a:solidFill>
-            <a:srgbClr val="2E8FA3"/>
+            <a:srgbClr val="0A162A"/>
           </a:solidFill>
           <a:ln>
             <a:noFill/>
@@ -6927,8 +8356,8 @@
         </p:nvSpPr>
         <p:spPr>
           <a:xfrm>
-            <a:off x="804672" y="4882896"/>
-            <a:ext cx="10607040" cy="658368"/>
+            <a:off x="685800" y="5285232"/>
+            <a:ext cx="10881360" cy="713232"/>
           </a:xfrm>
           <a:prstGeom prst="rect">
             <a:avLst/>
@@ -6947,7 +8376,7 @@
               </a:lnSpc>
             </a:pPr>
             <a:r>
-              <a:rPr sz="4200" b="1">
+              <a:rPr sz="4400" b="1">
                 <a:solidFill>
                   <a:srgbClr val="FFFFFF"/>
                 </a:solidFill>
@@ -6968,8 +8397,8 @@
         </p:nvSpPr>
         <p:spPr>
           <a:xfrm>
-            <a:off x="822960" y="5641848"/>
-            <a:ext cx="10149840" cy="347472"/>
+            <a:off x="713232" y="6071616"/>
+            <a:ext cx="10424160" cy="384048"/>
           </a:xfrm>
           <a:prstGeom prst="rect">
             <a:avLst/>
@@ -6996,7 +8425,7 @@
                 <a:ea typeface="Hiragino Sans"/>
                 <a:cs typeface="Hiragino Sans"/>
               </a:rPr>
-              <a:t>自分でテーマを決めて、とことん掘る学校</a:t>
+              <a:t>自分のテーマを、とことん掘れる学校。</a:t>
             </a:r>
           </a:p>
         </p:txBody>
@@ -7189,14 +8618,264 @@
       </p:sp>
       <p:sp>
         <p:nvSpPr>
-          <p:cNvPr id="6" name="Oval 5"/>
+          <p:cNvPr id="6" name="Rounded Rectangle 5"/>
           <p:cNvSpPr/>
           <p:nvPr/>
         </p:nvSpPr>
         <p:spPr>
           <a:xfrm>
-            <a:off x="658368" y="1600200"/>
-            <a:ext cx="182880" cy="182880"/>
+            <a:off x="658368" y="1170432"/>
+            <a:ext cx="7315200" cy="1847088"/>
+          </a:xfrm>
+          <a:prstGeom prst="roundRect">
+            <a:avLst>
+              <a:gd name="adj" fmla="val 6000"/>
+            </a:avLst>
+          </a:prstGeom>
+          <a:solidFill>
+            <a:srgbClr val="FFFFFF"/>
+          </a:solidFill>
+          <a:ln w="9525">
+            <a:solidFill>
+              <a:srgbClr val="D7DDE8"/>
+            </a:solidFill>
+          </a:ln>
+        </p:spPr>
+        <p:style>
+          <a:lnRef idx="1">
+            <a:schemeClr val="accent1"/>
+          </a:lnRef>
+          <a:fillRef idx="3">
+            <a:schemeClr val="accent1"/>
+          </a:fillRef>
+          <a:effectRef idx="2">
+            <a:schemeClr val="accent1"/>
+          </a:effectRef>
+          <a:fontRef idx="minor">
+            <a:schemeClr val="lt1"/>
+          </a:fontRef>
+        </p:style>
+        <p:txBody>
+          <a:bodyPr rtlCol="0" anchor="ctr"/>
+          <a:lstStyle/>
+          <a:p>
+            <a:pPr algn="ctr"/>
+          </a:p>
+        </p:txBody>
+      </p:sp>
+      <p:pic>
+        <p:nvPicPr>
+          <p:cNvPr id="7" name="Picture 6" descr="wiki_hongodai_card.jpg"/>
+          <p:cNvPicPr>
+            <a:picLocks noChangeAspect="1"/>
+          </p:cNvPicPr>
+          <p:nvPr/>
+        </p:nvPicPr>
+        <p:blipFill>
+          <a:blip r:embed="rId2"/>
+          <a:srcRect t="2928" b="2928"/>
+          <a:stretch>
+            <a:fillRect/>
+          </a:stretch>
+        </p:blipFill>
+        <p:spPr>
+          <a:xfrm>
+            <a:off x="731520" y="1243584"/>
+            <a:ext cx="7168896" cy="1700784"/>
+          </a:xfrm>
+          <a:prstGeom prst="rect">
+            <a:avLst/>
+          </a:prstGeom>
+        </p:spPr>
+      </p:pic>
+      <p:sp>
+        <p:nvSpPr>
+          <p:cNvPr id="8" name="Rounded Rectangle 7"/>
+          <p:cNvSpPr/>
+          <p:nvPr/>
+        </p:nvSpPr>
+        <p:spPr>
+          <a:xfrm>
+            <a:off x="731520" y="1243584"/>
+            <a:ext cx="7168896" cy="1700784"/>
+          </a:xfrm>
+          <a:prstGeom prst="roundRect">
+            <a:avLst>
+              <a:gd name="adj" fmla="val 4000"/>
+            </a:avLst>
+          </a:prstGeom>
+          <a:noFill/>
+          <a:ln w="12700">
+            <a:solidFill>
+              <a:srgbClr val="FFFFFF"/>
+            </a:solidFill>
+          </a:ln>
+        </p:spPr>
+        <p:style>
+          <a:lnRef idx="1">
+            <a:schemeClr val="accent1"/>
+          </a:lnRef>
+          <a:fillRef idx="3">
+            <a:schemeClr val="accent1"/>
+          </a:fillRef>
+          <a:effectRef idx="2">
+            <a:schemeClr val="accent1"/>
+          </a:effectRef>
+          <a:fontRef idx="minor">
+            <a:schemeClr val="lt1"/>
+          </a:fontRef>
+        </p:style>
+        <p:txBody>
+          <a:bodyPr rtlCol="0" anchor="ctr"/>
+          <a:lstStyle/>
+          <a:p>
+            <a:pPr algn="ctr"/>
+          </a:p>
+        </p:txBody>
+      </p:sp>
+      <p:sp>
+        <p:nvSpPr>
+          <p:cNvPr id="9" name="Rounded Rectangle 8"/>
+          <p:cNvSpPr/>
+          <p:nvPr/>
+        </p:nvSpPr>
+        <p:spPr>
+          <a:xfrm>
+            <a:off x="731520" y="2615184"/>
+            <a:ext cx="7168896" cy="329184"/>
+          </a:xfrm>
+          <a:prstGeom prst="roundRect">
+            <a:avLst>
+              <a:gd name="adj" fmla="val 6000"/>
+            </a:avLst>
+          </a:prstGeom>
+          <a:solidFill>
+            <a:srgbClr val="0A162A"/>
+          </a:solidFill>
+          <a:ln>
+            <a:noFill/>
+          </a:ln>
+        </p:spPr>
+        <p:style>
+          <a:lnRef idx="1">
+            <a:schemeClr val="accent1"/>
+          </a:lnRef>
+          <a:fillRef idx="3">
+            <a:schemeClr val="accent1"/>
+          </a:fillRef>
+          <a:effectRef idx="2">
+            <a:schemeClr val="accent1"/>
+          </a:effectRef>
+          <a:fontRef idx="minor">
+            <a:schemeClr val="lt1"/>
+          </a:fontRef>
+        </p:style>
+        <p:txBody>
+          <a:bodyPr rtlCol="0" anchor="ctr"/>
+          <a:lstStyle/>
+          <a:p>
+            <a:pPr algn="ctr"/>
+          </a:p>
+        </p:txBody>
+      </p:sp>
+      <p:sp>
+        <p:nvSpPr>
+          <p:cNvPr id="10" name="TextBox 9"/>
+          <p:cNvSpPr txBox="1"/>
+          <p:nvPr/>
+        </p:nvSpPr>
+        <p:spPr>
+          <a:xfrm>
+            <a:off x="859536" y="2670048"/>
+            <a:ext cx="6912864" cy="219456"/>
+          </a:xfrm>
+          <a:prstGeom prst="rect">
+            <a:avLst/>
+          </a:prstGeom>
+          <a:noFill/>
+        </p:spPr>
+        <p:txBody>
+          <a:bodyPr wrap="square" anchor="ctr" lIns="0" rIns="0" tIns="0" bIns="0">
+            <a:spAutoFit/>
+          </a:bodyPr>
+          <a:lstStyle/>
+          <a:p>
+            <a:pPr algn="l">
+              <a:lnSpc>
+                <a:spcPct val="115000"/>
+              </a:lnSpc>
+            </a:pPr>
+            <a:r>
+              <a:rPr sz="900" b="1">
+                <a:solidFill>
+                  <a:srgbClr val="FFFFFF"/>
+                </a:solidFill>
+                <a:latin typeface="Hiragino Sans"/>
+                <a:ea typeface="Hiragino Sans"/>
+                <a:cs typeface="Hiragino Sans"/>
+              </a:rPr>
+              <a:t>本郷台駅から通学</a:t>
+            </a:r>
+          </a:p>
+        </p:txBody>
+      </p:sp>
+      <p:sp>
+        <p:nvSpPr>
+          <p:cNvPr id="11" name="Rounded Rectangle 10"/>
+          <p:cNvSpPr/>
+          <p:nvPr/>
+        </p:nvSpPr>
+        <p:spPr>
+          <a:xfrm>
+            <a:off x="658368" y="3182112"/>
+            <a:ext cx="10863072" cy="566928"/>
+          </a:xfrm>
+          <a:prstGeom prst="roundRect">
+            <a:avLst>
+              <a:gd name="adj" fmla="val 6000"/>
+            </a:avLst>
+          </a:prstGeom>
+          <a:solidFill>
+            <a:srgbClr val="FFFFFF"/>
+          </a:solidFill>
+          <a:ln w="9525">
+            <a:solidFill>
+              <a:srgbClr val="D7DDE8"/>
+            </a:solidFill>
+          </a:ln>
+        </p:spPr>
+        <p:style>
+          <a:lnRef idx="1">
+            <a:schemeClr val="accent1"/>
+          </a:lnRef>
+          <a:fillRef idx="3">
+            <a:schemeClr val="accent1"/>
+          </a:fillRef>
+          <a:effectRef idx="2">
+            <a:schemeClr val="accent1"/>
+          </a:effectRef>
+          <a:fontRef idx="minor">
+            <a:schemeClr val="lt1"/>
+          </a:fontRef>
+        </p:style>
+        <p:txBody>
+          <a:bodyPr rtlCol="0" anchor="ctr"/>
+          <a:lstStyle/>
+          <a:p>
+            <a:pPr algn="ctr"/>
+          </a:p>
+        </p:txBody>
+      </p:sp>
+      <p:sp>
+        <p:nvSpPr>
+          <p:cNvPr id="12" name="Oval 11"/>
+          <p:cNvSpPr/>
+          <p:nvPr/>
+        </p:nvSpPr>
+        <p:spPr>
+          <a:xfrm>
+            <a:off x="896112" y="3383280"/>
+            <a:ext cx="146304" cy="146304"/>
           </a:xfrm>
           <a:prstGeom prst="ellipse">
             <a:avLst/>
@@ -7234,14 +8913,14 @@
       </p:sp>
       <p:sp>
         <p:nvSpPr>
-          <p:cNvPr id="7" name="TextBox 6"/>
+          <p:cNvPr id="13" name="TextBox 12"/>
           <p:cNvSpPr txBox="1"/>
           <p:nvPr/>
         </p:nvSpPr>
         <p:spPr>
           <a:xfrm>
-            <a:off x="1170432" y="1481328"/>
-            <a:ext cx="5806440" cy="621792"/>
+            <a:off x="1207008" y="3255264"/>
+            <a:ext cx="9966960" cy="420624"/>
           </a:xfrm>
           <a:prstGeom prst="rect">
             <a:avLst/>
@@ -7249,18 +8928,151 @@
           <a:noFill/>
         </p:spPr>
         <p:txBody>
-          <a:bodyPr wrap="square" anchor="t" lIns="0" rIns="0" tIns="0" bIns="0">
+          <a:bodyPr wrap="square" anchor="ctr" lIns="0" rIns="0" tIns="0" bIns="0">
             <a:spAutoFit/>
           </a:bodyPr>
           <a:lstStyle/>
           <a:p>
             <a:pPr algn="l">
               <a:lnSpc>
-                <a:spcPct val="115000"/>
+                <a:spcPct val="98000"/>
               </a:lnSpc>
             </a:pPr>
             <a:r>
-              <a:rPr sz="1700" b="1">
+              <a:rPr sz="1040" b="1">
+                <a:solidFill>
+                  <a:srgbClr val="1A1A1A"/>
+                </a:solidFill>
+                <a:latin typeface="Hiragino Sans"/>
+                <a:ea typeface="Hiragino Sans"/>
+                <a:cs typeface="Hiragino Sans"/>
+              </a:rPr>
+              <a:t>理科の研究が特色（SSH）。「柏陽の知」で一年かけて、自分で決めたテーマを研究できる</a:t>
+            </a:r>
+          </a:p>
+        </p:txBody>
+      </p:sp>
+      <p:sp>
+        <p:nvSpPr>
+          <p:cNvPr id="14" name="Rounded Rectangle 13"/>
+          <p:cNvSpPr/>
+          <p:nvPr/>
+        </p:nvSpPr>
+        <p:spPr>
+          <a:xfrm>
+            <a:off x="658368" y="3767328"/>
+            <a:ext cx="10863072" cy="566928"/>
+          </a:xfrm>
+          <a:prstGeom prst="roundRect">
+            <a:avLst>
+              <a:gd name="adj" fmla="val 6000"/>
+            </a:avLst>
+          </a:prstGeom>
+          <a:solidFill>
+            <a:srgbClr val="FFFFFF"/>
+          </a:solidFill>
+          <a:ln w="9525">
+            <a:solidFill>
+              <a:srgbClr val="D7DDE8"/>
+            </a:solidFill>
+          </a:ln>
+        </p:spPr>
+        <p:style>
+          <a:lnRef idx="1">
+            <a:schemeClr val="accent1"/>
+          </a:lnRef>
+          <a:fillRef idx="3">
+            <a:schemeClr val="accent1"/>
+          </a:fillRef>
+          <a:effectRef idx="2">
+            <a:schemeClr val="accent1"/>
+          </a:effectRef>
+          <a:fontRef idx="minor">
+            <a:schemeClr val="lt1"/>
+          </a:fontRef>
+        </p:style>
+        <p:txBody>
+          <a:bodyPr rtlCol="0" anchor="ctr"/>
+          <a:lstStyle/>
+          <a:p>
+            <a:pPr algn="ctr"/>
+          </a:p>
+        </p:txBody>
+      </p:sp>
+      <p:sp>
+        <p:nvSpPr>
+          <p:cNvPr id="15" name="Oval 14"/>
+          <p:cNvSpPr/>
+          <p:nvPr/>
+        </p:nvSpPr>
+        <p:spPr>
+          <a:xfrm>
+            <a:off x="896112" y="3968496"/>
+            <a:ext cx="146304" cy="146304"/>
+          </a:xfrm>
+          <a:prstGeom prst="ellipse">
+            <a:avLst/>
+          </a:prstGeom>
+          <a:solidFill>
+            <a:srgbClr val="2E8FA3"/>
+          </a:solidFill>
+          <a:ln w="9525">
+            <a:solidFill>
+              <a:srgbClr val="2E8FA3"/>
+            </a:solidFill>
+          </a:ln>
+        </p:spPr>
+        <p:style>
+          <a:lnRef idx="1">
+            <a:schemeClr val="accent1"/>
+          </a:lnRef>
+          <a:fillRef idx="3">
+            <a:schemeClr val="accent1"/>
+          </a:fillRef>
+          <a:effectRef idx="2">
+            <a:schemeClr val="accent1"/>
+          </a:effectRef>
+          <a:fontRef idx="minor">
+            <a:schemeClr val="lt1"/>
+          </a:fontRef>
+        </p:style>
+        <p:txBody>
+          <a:bodyPr rtlCol="0" anchor="ctr"/>
+          <a:lstStyle/>
+          <a:p>
+            <a:pPr algn="ctr"/>
+          </a:p>
+        </p:txBody>
+      </p:sp>
+      <p:sp>
+        <p:nvSpPr>
+          <p:cNvPr id="16" name="TextBox 15"/>
+          <p:cNvSpPr txBox="1"/>
+          <p:nvPr/>
+        </p:nvSpPr>
+        <p:spPr>
+          <a:xfrm>
+            <a:off x="1207008" y="3840480"/>
+            <a:ext cx="9966960" cy="420624"/>
+          </a:xfrm>
+          <a:prstGeom prst="rect">
+            <a:avLst/>
+          </a:prstGeom>
+          <a:noFill/>
+        </p:spPr>
+        <p:txBody>
+          <a:bodyPr wrap="square" anchor="ctr" lIns="0" rIns="0" tIns="0" bIns="0">
+            <a:spAutoFit/>
+          </a:bodyPr>
+          <a:lstStyle/>
+          <a:p>
+            <a:pPr algn="l">
+              <a:lnSpc>
+                <a:spcPct val="98000"/>
+              </a:lnSpc>
+            </a:pPr>
+            <a:r>
+              <a:rPr sz="1040" b="1">
                 <a:solidFill>
                   <a:srgbClr val="1A1A1A"/>
                 </a:solidFill>
@@ -7275,14 +9087,61 @@
       </p:sp>
       <p:sp>
         <p:nvSpPr>
-          <p:cNvPr id="8" name="Oval 7"/>
+          <p:cNvPr id="17" name="Rounded Rectangle 16"/>
           <p:cNvSpPr/>
           <p:nvPr/>
         </p:nvSpPr>
         <p:spPr>
           <a:xfrm>
-            <a:off x="658368" y="2542032"/>
-            <a:ext cx="182880" cy="182880"/>
+            <a:off x="658368" y="4352544"/>
+            <a:ext cx="10863072" cy="566928"/>
+          </a:xfrm>
+          <a:prstGeom prst="roundRect">
+            <a:avLst>
+              <a:gd name="adj" fmla="val 6000"/>
+            </a:avLst>
+          </a:prstGeom>
+          <a:solidFill>
+            <a:srgbClr val="FFFFFF"/>
+          </a:solidFill>
+          <a:ln w="9525">
+            <a:solidFill>
+              <a:srgbClr val="D7DDE8"/>
+            </a:solidFill>
+          </a:ln>
+        </p:spPr>
+        <p:style>
+          <a:lnRef idx="1">
+            <a:schemeClr val="accent1"/>
+          </a:lnRef>
+          <a:fillRef idx="3">
+            <a:schemeClr val="accent1"/>
+          </a:fillRef>
+          <a:effectRef idx="2">
+            <a:schemeClr val="accent1"/>
+          </a:effectRef>
+          <a:fontRef idx="minor">
+            <a:schemeClr val="lt1"/>
+          </a:fontRef>
+        </p:style>
+        <p:txBody>
+          <a:bodyPr rtlCol="0" anchor="ctr"/>
+          <a:lstStyle/>
+          <a:p>
+            <a:pPr algn="ctr"/>
+          </a:p>
+        </p:txBody>
+      </p:sp>
+      <p:sp>
+        <p:nvSpPr>
+          <p:cNvPr id="18" name="Oval 17"/>
+          <p:cNvSpPr/>
+          <p:nvPr/>
+        </p:nvSpPr>
+        <p:spPr>
+          <a:xfrm>
+            <a:off x="896112" y="4553712"/>
+            <a:ext cx="146304" cy="146304"/>
           </a:xfrm>
           <a:prstGeom prst="ellipse">
             <a:avLst/>
@@ -7320,14 +9179,14 @@
       </p:sp>
       <p:sp>
         <p:nvSpPr>
-          <p:cNvPr id="9" name="TextBox 8"/>
+          <p:cNvPr id="19" name="TextBox 18"/>
           <p:cNvSpPr txBox="1"/>
           <p:nvPr/>
         </p:nvSpPr>
         <p:spPr>
           <a:xfrm>
-            <a:off x="1170432" y="2423160"/>
-            <a:ext cx="5806440" cy="621792"/>
+            <a:off x="1207008" y="4425696"/>
+            <a:ext cx="9966960" cy="420624"/>
           </a:xfrm>
           <a:prstGeom prst="rect">
             <a:avLst/>
@@ -7335,18 +9194,18 @@
           <a:noFill/>
         </p:spPr>
         <p:txBody>
-          <a:bodyPr wrap="square" anchor="t" lIns="0" rIns="0" tIns="0" bIns="0">
+          <a:bodyPr wrap="square" anchor="ctr" lIns="0" rIns="0" tIns="0" bIns="0">
             <a:spAutoFit/>
           </a:bodyPr>
           <a:lstStyle/>
           <a:p>
             <a:pPr algn="l">
               <a:lnSpc>
-                <a:spcPct val="115000"/>
+                <a:spcPct val="98000"/>
               </a:lnSpc>
             </a:pPr>
             <a:r>
-              <a:rPr sz="1700" b="1">
+              <a:rPr sz="1040" b="1">
                 <a:solidFill>
                   <a:srgbClr val="1A1A1A"/>
                 </a:solidFill>
@@ -7354,21 +9213,68 @@
                 <a:ea typeface="Hiragino Sans"/>
                 <a:cs typeface="Hiragino Sans"/>
               </a:rPr>
-              <a:t>理科の研究が特色（SSH）。「柏陽の知」で一年かけて自分のテーマを研究できる</a:t>
-            </a:r>
-          </a:p>
-        </p:txBody>
-      </p:sp>
-      <p:sp>
-        <p:nvSpPr>
-          <p:cNvPr id="10" name="Oval 9"/>
+              <a:t>自分のペースで落ち着いて学べる環境</a:t>
+            </a:r>
+          </a:p>
+        </p:txBody>
+      </p:sp>
+      <p:sp>
+        <p:nvSpPr>
+          <p:cNvPr id="20" name="Rounded Rectangle 19"/>
           <p:cNvSpPr/>
           <p:nvPr/>
         </p:nvSpPr>
         <p:spPr>
           <a:xfrm>
-            <a:off x="658368" y="3483864"/>
-            <a:ext cx="182880" cy="182880"/>
+            <a:off x="658368" y="4937760"/>
+            <a:ext cx="10863072" cy="566928"/>
+          </a:xfrm>
+          <a:prstGeom prst="roundRect">
+            <a:avLst>
+              <a:gd name="adj" fmla="val 6000"/>
+            </a:avLst>
+          </a:prstGeom>
+          <a:solidFill>
+            <a:srgbClr val="FFFFFF"/>
+          </a:solidFill>
+          <a:ln w="9525">
+            <a:solidFill>
+              <a:srgbClr val="D7DDE8"/>
+            </a:solidFill>
+          </a:ln>
+        </p:spPr>
+        <p:style>
+          <a:lnRef idx="1">
+            <a:schemeClr val="accent1"/>
+          </a:lnRef>
+          <a:fillRef idx="3">
+            <a:schemeClr val="accent1"/>
+          </a:fillRef>
+          <a:effectRef idx="2">
+            <a:schemeClr val="accent1"/>
+          </a:effectRef>
+          <a:fontRef idx="minor">
+            <a:schemeClr val="lt1"/>
+          </a:fontRef>
+        </p:style>
+        <p:txBody>
+          <a:bodyPr rtlCol="0" anchor="ctr"/>
+          <a:lstStyle/>
+          <a:p>
+            <a:pPr algn="ctr"/>
+          </a:p>
+        </p:txBody>
+      </p:sp>
+      <p:sp>
+        <p:nvSpPr>
+          <p:cNvPr id="21" name="Oval 20"/>
+          <p:cNvSpPr/>
+          <p:nvPr/>
+        </p:nvSpPr>
+        <p:spPr>
+          <a:xfrm>
+            <a:off x="896112" y="5138928"/>
+            <a:ext cx="146304" cy="146304"/>
           </a:xfrm>
           <a:prstGeom prst="ellipse">
             <a:avLst/>
@@ -7406,14 +9312,14 @@
       </p:sp>
       <p:sp>
         <p:nvSpPr>
-          <p:cNvPr id="11" name="TextBox 10"/>
+          <p:cNvPr id="22" name="TextBox 21"/>
           <p:cNvSpPr txBox="1"/>
           <p:nvPr/>
         </p:nvSpPr>
         <p:spPr>
           <a:xfrm>
-            <a:off x="1170432" y="3364992"/>
-            <a:ext cx="5806440" cy="621792"/>
+            <a:off x="1207008" y="5010912"/>
+            <a:ext cx="9966960" cy="420624"/>
           </a:xfrm>
           <a:prstGeom prst="rect">
             <a:avLst/>
@@ -7421,18 +9327,18 @@
           <a:noFill/>
         </p:spPr>
         <p:txBody>
-          <a:bodyPr wrap="square" anchor="t" lIns="0" rIns="0" tIns="0" bIns="0">
+          <a:bodyPr wrap="square" anchor="ctr" lIns="0" rIns="0" tIns="0" bIns="0">
             <a:spAutoFit/>
           </a:bodyPr>
           <a:lstStyle/>
           <a:p>
             <a:pPr algn="l">
               <a:lnSpc>
-                <a:spcPct val="115000"/>
+                <a:spcPct val="98000"/>
               </a:lnSpc>
             </a:pPr>
             <a:r>
-              <a:rPr sz="1700" b="1">
+              <a:rPr sz="1040" b="1">
                 <a:solidFill>
                   <a:srgbClr val="1A1A1A"/>
                 </a:solidFill>
@@ -7440,21 +9346,21 @@
                 <a:ea typeface="Hiragino Sans"/>
                 <a:cs typeface="Hiragino Sans"/>
               </a:rPr>
-              <a:t>横浜・栄区、本郷台駅エリア（大船から根岸線で行ける）</a:t>
-            </a:r>
-          </a:p>
-        </p:txBody>
-      </p:sp>
-      <p:sp>
-        <p:nvSpPr>
-          <p:cNvPr id="12" name="Rounded Rectangle 11"/>
+              <a:t>JR根岸線「本郷台」駅エリア（大船から一本）</a:t>
+            </a:r>
+          </a:p>
+        </p:txBody>
+      </p:sp>
+      <p:sp>
+        <p:nvSpPr>
+          <p:cNvPr id="23" name="Rounded Rectangle 22"/>
           <p:cNvSpPr/>
           <p:nvPr/>
         </p:nvSpPr>
         <p:spPr>
           <a:xfrm>
-            <a:off x="658368" y="4709160"/>
-            <a:ext cx="6217920" cy="566928"/>
+            <a:off x="658368" y="5632704"/>
+            <a:ext cx="6217920" cy="420624"/>
           </a:xfrm>
           <a:prstGeom prst="roundRect">
             <a:avLst>
@@ -7494,14 +9400,14 @@
       </p:sp>
       <p:sp>
         <p:nvSpPr>
-          <p:cNvPr id="13" name="TextBox 12"/>
+          <p:cNvPr id="24" name="TextBox 23"/>
           <p:cNvSpPr txBox="1"/>
           <p:nvPr/>
         </p:nvSpPr>
         <p:spPr>
           <a:xfrm>
-            <a:off x="932688" y="4882896"/>
-            <a:ext cx="5669280" cy="219456"/>
+            <a:off x="932688" y="5760720"/>
+            <a:ext cx="5669280" cy="182880"/>
           </a:xfrm>
           <a:prstGeom prst="rect">
             <a:avLst/>
@@ -7520,7 +9426,7 @@
               </a:lnSpc>
             </a:pPr>
             <a:r>
-              <a:rPr sz="1500" b="1">
+              <a:rPr sz="1300" b="1">
                 <a:solidFill>
                   <a:srgbClr val="1E6575"/>
                 </a:solidFill>
@@ -7535,216 +9441,13 @@
       </p:sp>
       <p:sp>
         <p:nvSpPr>
-          <p:cNvPr id="14" name="Rounded Rectangle 13"/>
-          <p:cNvSpPr/>
-          <p:nvPr/>
-        </p:nvSpPr>
-        <p:spPr>
-          <a:xfrm>
-            <a:off x="7360920" y="1335024"/>
-            <a:ext cx="4224528" cy="2578608"/>
-          </a:xfrm>
-          <a:prstGeom prst="roundRect">
-            <a:avLst>
-              <a:gd name="adj" fmla="val 6000"/>
-            </a:avLst>
-          </a:prstGeom>
-          <a:solidFill>
-            <a:srgbClr val="FFFFFF"/>
-          </a:solidFill>
-          <a:ln w="9525">
-            <a:solidFill>
-              <a:srgbClr val="D7DDE8"/>
-            </a:solidFill>
-          </a:ln>
-        </p:spPr>
-        <p:style>
-          <a:lnRef idx="1">
-            <a:schemeClr val="accent1"/>
-          </a:lnRef>
-          <a:fillRef idx="3">
-            <a:schemeClr val="accent1"/>
-          </a:fillRef>
-          <a:effectRef idx="2">
-            <a:schemeClr val="accent1"/>
-          </a:effectRef>
-          <a:fontRef idx="minor">
-            <a:schemeClr val="lt1"/>
-          </a:fontRef>
-        </p:style>
-        <p:txBody>
-          <a:bodyPr rtlCol="0" anchor="ctr"/>
-          <a:lstStyle/>
-          <a:p>
-            <a:pPr algn="ctr"/>
-          </a:p>
-        </p:txBody>
-      </p:sp>
-      <p:pic>
-        <p:nvPicPr>
-          <p:cNvPr id="15" name="Picture 14" descr="wiki_campus_hero.jpg"/>
-          <p:cNvPicPr>
-            <a:picLocks noChangeAspect="1"/>
-          </p:cNvPicPr>
-          <p:nvPr/>
-        </p:nvPicPr>
-        <p:blipFill>
-          <a:blip r:embed="rId2"/>
-          <a:srcRect t="9883" b="9883"/>
-          <a:stretch>
-            <a:fillRect/>
-          </a:stretch>
-        </p:blipFill>
-        <p:spPr>
-          <a:xfrm>
-            <a:off x="7434072" y="1408176"/>
-            <a:ext cx="4078224" cy="2432304"/>
-          </a:xfrm>
-          <a:prstGeom prst="rect">
-            <a:avLst/>
-          </a:prstGeom>
-        </p:spPr>
-      </p:pic>
-      <p:sp>
-        <p:nvSpPr>
-          <p:cNvPr id="16" name="Rounded Rectangle 15"/>
-          <p:cNvSpPr/>
-          <p:nvPr/>
-        </p:nvSpPr>
-        <p:spPr>
-          <a:xfrm>
-            <a:off x="7434072" y="1408176"/>
-            <a:ext cx="4078224" cy="2432304"/>
-          </a:xfrm>
-          <a:prstGeom prst="roundRect">
-            <a:avLst>
-              <a:gd name="adj" fmla="val 4000"/>
-            </a:avLst>
-          </a:prstGeom>
-          <a:noFill/>
-          <a:ln w="12700">
-            <a:solidFill>
-              <a:srgbClr val="FFFFFF"/>
-            </a:solidFill>
-          </a:ln>
-        </p:spPr>
-        <p:style>
-          <a:lnRef idx="1">
-            <a:schemeClr val="accent1"/>
-          </a:lnRef>
-          <a:fillRef idx="3">
-            <a:schemeClr val="accent1"/>
-          </a:fillRef>
-          <a:effectRef idx="2">
-            <a:schemeClr val="accent1"/>
-          </a:effectRef>
-          <a:fontRef idx="minor">
-            <a:schemeClr val="lt1"/>
-          </a:fontRef>
-        </p:style>
-        <p:txBody>
-          <a:bodyPr rtlCol="0" anchor="ctr"/>
-          <a:lstStyle/>
-          <a:p>
-            <a:pPr algn="ctr"/>
-          </a:p>
-        </p:txBody>
-      </p:sp>
-      <p:sp>
-        <p:nvSpPr>
-          <p:cNvPr id="17" name="Rounded Rectangle 16"/>
-          <p:cNvSpPr/>
-          <p:nvPr/>
-        </p:nvSpPr>
-        <p:spPr>
-          <a:xfrm>
-            <a:off x="7434072" y="3511296"/>
-            <a:ext cx="4078224" cy="329184"/>
-          </a:xfrm>
-          <a:prstGeom prst="roundRect">
-            <a:avLst>
-              <a:gd name="adj" fmla="val 6000"/>
-            </a:avLst>
-          </a:prstGeom>
-          <a:solidFill>
-            <a:srgbClr val="0A162A"/>
-          </a:solidFill>
-          <a:ln>
-            <a:noFill/>
-          </a:ln>
-        </p:spPr>
-        <p:style>
-          <a:lnRef idx="1">
-            <a:schemeClr val="accent1"/>
-          </a:lnRef>
-          <a:fillRef idx="3">
-            <a:schemeClr val="accent1"/>
-          </a:fillRef>
-          <a:effectRef idx="2">
-            <a:schemeClr val="accent1"/>
-          </a:effectRef>
-          <a:fontRef idx="minor">
-            <a:schemeClr val="lt1"/>
-          </a:fontRef>
-        </p:style>
-        <p:txBody>
-          <a:bodyPr rtlCol="0" anchor="ctr"/>
-          <a:lstStyle/>
-          <a:p>
-            <a:pPr algn="ctr"/>
-          </a:p>
-        </p:txBody>
-      </p:sp>
-      <p:sp>
-        <p:nvSpPr>
-          <p:cNvPr id="18" name="TextBox 17"/>
+          <p:cNvPr id="25" name="TextBox 24"/>
           <p:cNvSpPr txBox="1"/>
           <p:nvPr/>
         </p:nvSpPr>
         <p:spPr>
           <a:xfrm>
-            <a:off x="7562088" y="3566160"/>
-            <a:ext cx="3822192" cy="219456"/>
-          </a:xfrm>
-          <a:prstGeom prst="rect">
-            <a:avLst/>
-          </a:prstGeom>
-          <a:noFill/>
-        </p:spPr>
-        <p:txBody>
-          <a:bodyPr wrap="square" anchor="ctr" lIns="0" rIns="0" tIns="0" bIns="0">
-            <a:spAutoFit/>
-          </a:bodyPr>
-          <a:lstStyle/>
-          <a:p>
-            <a:pPr algn="l">
-              <a:lnSpc>
-                <a:spcPct val="115000"/>
-              </a:lnSpc>
-            </a:pPr>
-            <a:r>
-              <a:rPr sz="900" b="1">
-                <a:solidFill>
-                  <a:srgbClr val="FFFFFF"/>
-                </a:solidFill>
-                <a:latin typeface="Hiragino Sans"/>
-                <a:ea typeface="Hiragino Sans"/>
-                <a:cs typeface="Hiragino Sans"/>
-              </a:rPr>
-              <a:t>校舎</a:t>
-            </a:r>
-          </a:p>
-        </p:txBody>
-      </p:sp>
-      <p:sp>
-        <p:nvSpPr>
-          <p:cNvPr id="19" name="TextBox 18"/>
-          <p:cNvSpPr txBox="1"/>
-          <p:nvPr/>
-        </p:nvSpPr>
-        <p:spPr>
-          <a:xfrm>
-            <a:off x="658368" y="6236208"/>
+            <a:off x="658368" y="6327648"/>
             <a:ext cx="9875520" cy="201168"/>
           </a:xfrm>
           <a:prstGeom prst="rect">
